--- a/Slide/C/1.Variable.pptx
+++ b/Slide/C/1.Variable.pptx
@@ -6,17 +6,19 @@
   </p:sldMasterIdLst>
   <p:sldIdLst>
     <p:sldId id="256" r:id="rId2"/>
-    <p:sldId id="257" r:id="rId3"/>
-    <p:sldId id="286" r:id="rId4"/>
-    <p:sldId id="258" r:id="rId5"/>
-    <p:sldId id="259" r:id="rId6"/>
-    <p:sldId id="260" r:id="rId7"/>
-    <p:sldId id="285" r:id="rId8"/>
-    <p:sldId id="262" r:id="rId9"/>
-    <p:sldId id="263" r:id="rId10"/>
-    <p:sldId id="277" r:id="rId11"/>
-    <p:sldId id="284" r:id="rId12"/>
-    <p:sldId id="283" r:id="rId13"/>
+    <p:sldId id="287" r:id="rId3"/>
+    <p:sldId id="257" r:id="rId4"/>
+    <p:sldId id="286" r:id="rId5"/>
+    <p:sldId id="258" r:id="rId6"/>
+    <p:sldId id="259" r:id="rId7"/>
+    <p:sldId id="288" r:id="rId8"/>
+    <p:sldId id="260" r:id="rId9"/>
+    <p:sldId id="285" r:id="rId10"/>
+    <p:sldId id="262" r:id="rId11"/>
+    <p:sldId id="263" r:id="rId12"/>
+    <p:sldId id="277" r:id="rId13"/>
+    <p:sldId id="284" r:id="rId14"/>
+    <p:sldId id="283" r:id="rId15"/>
   </p:sldIdLst>
   <p:sldSz cx="12192000" cy="6858000"/>
   <p:notesSz cx="6858000" cy="9144000"/>
@@ -263,7 +265,7 @@
           <a:p>
             <a:fld id="{ECA3AE87-C17F-4F2C-92FF-7FE21F8A66BE}" type="datetimeFigureOut">
               <a:rPr lang="en-US" smtClean="0"/>
-              <a:t>11/13/2024</a:t>
+              <a:t>3/18/2025</a:t>
             </a:fld>
             <a:endParaRPr lang="en-US"/>
           </a:p>
@@ -431,7 +433,7 @@
           <a:p>
             <a:fld id="{ECA3AE87-C17F-4F2C-92FF-7FE21F8A66BE}" type="datetimeFigureOut">
               <a:rPr lang="en-US" smtClean="0"/>
-              <a:t>11/13/2024</a:t>
+              <a:t>3/18/2025</a:t>
             </a:fld>
             <a:endParaRPr lang="en-US"/>
           </a:p>
@@ -609,7 +611,7 @@
           <a:p>
             <a:fld id="{ECA3AE87-C17F-4F2C-92FF-7FE21F8A66BE}" type="datetimeFigureOut">
               <a:rPr lang="en-US" smtClean="0"/>
-              <a:t>11/13/2024</a:t>
+              <a:t>3/18/2025</a:t>
             </a:fld>
             <a:endParaRPr lang="en-US"/>
           </a:p>
@@ -777,7 +779,7 @@
           <a:p>
             <a:fld id="{ECA3AE87-C17F-4F2C-92FF-7FE21F8A66BE}" type="datetimeFigureOut">
               <a:rPr lang="en-US" smtClean="0"/>
-              <a:t>11/13/2024</a:t>
+              <a:t>3/18/2025</a:t>
             </a:fld>
             <a:endParaRPr lang="en-US"/>
           </a:p>
@@ -1022,7 +1024,7 @@
           <a:p>
             <a:fld id="{ECA3AE87-C17F-4F2C-92FF-7FE21F8A66BE}" type="datetimeFigureOut">
               <a:rPr lang="en-US" smtClean="0"/>
-              <a:t>11/13/2024</a:t>
+              <a:t>3/18/2025</a:t>
             </a:fld>
             <a:endParaRPr lang="en-US"/>
           </a:p>
@@ -1251,7 +1253,7 @@
           <a:p>
             <a:fld id="{ECA3AE87-C17F-4F2C-92FF-7FE21F8A66BE}" type="datetimeFigureOut">
               <a:rPr lang="en-US" smtClean="0"/>
-              <a:t>11/13/2024</a:t>
+              <a:t>3/18/2025</a:t>
             </a:fld>
             <a:endParaRPr lang="en-US"/>
           </a:p>
@@ -1615,7 +1617,7 @@
           <a:p>
             <a:fld id="{ECA3AE87-C17F-4F2C-92FF-7FE21F8A66BE}" type="datetimeFigureOut">
               <a:rPr lang="en-US" smtClean="0"/>
-              <a:t>11/13/2024</a:t>
+              <a:t>3/18/2025</a:t>
             </a:fld>
             <a:endParaRPr lang="en-US"/>
           </a:p>
@@ -1732,7 +1734,7 @@
           <a:p>
             <a:fld id="{ECA3AE87-C17F-4F2C-92FF-7FE21F8A66BE}" type="datetimeFigureOut">
               <a:rPr lang="en-US" smtClean="0"/>
-              <a:t>11/13/2024</a:t>
+              <a:t>3/18/2025</a:t>
             </a:fld>
             <a:endParaRPr lang="en-US"/>
           </a:p>
@@ -1827,7 +1829,7 @@
           <a:p>
             <a:fld id="{ECA3AE87-C17F-4F2C-92FF-7FE21F8A66BE}" type="datetimeFigureOut">
               <a:rPr lang="en-US" smtClean="0"/>
-              <a:t>11/13/2024</a:t>
+              <a:t>3/18/2025</a:t>
             </a:fld>
             <a:endParaRPr lang="en-US"/>
           </a:p>
@@ -2102,7 +2104,7 @@
           <a:p>
             <a:fld id="{ECA3AE87-C17F-4F2C-92FF-7FE21F8A66BE}" type="datetimeFigureOut">
               <a:rPr lang="en-US" smtClean="0"/>
-              <a:t>11/13/2024</a:t>
+              <a:t>3/18/2025</a:t>
             </a:fld>
             <a:endParaRPr lang="en-US"/>
           </a:p>
@@ -2354,7 +2356,7 @@
           <a:p>
             <a:fld id="{ECA3AE87-C17F-4F2C-92FF-7FE21F8A66BE}" type="datetimeFigureOut">
               <a:rPr lang="en-US" smtClean="0"/>
-              <a:t>11/13/2024</a:t>
+              <a:t>3/18/2025</a:t>
             </a:fld>
             <a:endParaRPr lang="en-US"/>
           </a:p>
@@ -2565,7 +2567,7 @@
           <a:p>
             <a:fld id="{ECA3AE87-C17F-4F2C-92FF-7FE21F8A66BE}" type="datetimeFigureOut">
               <a:rPr lang="en-US" smtClean="0"/>
-              <a:t>11/13/2024</a:t>
+              <a:t>3/18/2025</a:t>
             </a:fld>
             <a:endParaRPr lang="en-US"/>
           </a:p>
@@ -3190,7 +3192,7 @@
           <a:p>
             <a:r>
               <a:rPr lang="en-US" sz="4000"/>
-              <a:t>3. Pointer variable</a:t>
+              <a:t>Open point: use variable</a:t>
             </a:r>
           </a:p>
         </p:txBody>
@@ -3210,7 +3212,7 @@
         <p:spPr>
           <a:xfrm>
             <a:off x="499932" y="2305050"/>
-            <a:ext cx="10938693" cy="1569660"/>
+            <a:ext cx="10938693" cy="4524315"/>
           </a:xfrm>
           <a:prstGeom prst="rect">
             <a:avLst/>
@@ -3225,41 +3227,119 @@
           </a:bodyPr>
           <a:lstStyle/>
           <a:p>
-            <a:pPr marL="457200" indent="-457200">
+            <a:pPr marL="285750" indent="-285750">
               <a:buFont typeface="Arial" panose="020B0604020202020204" pitchFamily="34" charset="0"/>
               <a:buChar char="•"/>
             </a:pPr>
             <a:r>
               <a:rPr lang="en-US" sz="3200"/>
-              <a:t>What is the pointer?</a:t>
-            </a:r>
-          </a:p>
-          <a:p>
-            <a:pPr marL="457200" indent="-457200">
+              <a:t>Memory occupy</a:t>
+            </a:r>
+          </a:p>
+          <a:p>
+            <a:pPr marL="285750" indent="-285750">
               <a:buFont typeface="Arial" panose="020B0604020202020204" pitchFamily="34" charset="0"/>
               <a:buChar char="•"/>
             </a:pPr>
             <a:r>
               <a:rPr lang="en-US" sz="3200"/>
-              <a:t>Does pointer has address itself?</a:t>
-            </a:r>
-          </a:p>
-          <a:p>
-            <a:pPr marL="457200" indent="-457200">
+              <a:t>Meaningful: int x?</a:t>
+            </a:r>
+          </a:p>
+          <a:p>
+            <a:pPr marL="285750" indent="-285750">
               <a:buFont typeface="Arial" panose="020B0604020202020204" pitchFamily="34" charset="0"/>
               <a:buChar char="•"/>
             </a:pPr>
             <a:r>
               <a:rPr lang="en-US" sz="3200"/>
-              <a:t>NULL pointer</a:t>
-            </a:r>
-          </a:p>
-        </p:txBody>
-      </p:sp>
+              <a:t>Exercise</a:t>
+            </a:r>
+          </a:p>
+          <a:p>
+            <a:pPr marL="742950" lvl="1" indent="-285750">
+              <a:buFont typeface="Arial" panose="020B0604020202020204" pitchFamily="34" charset="0"/>
+              <a:buChar char="•"/>
+            </a:pPr>
+            <a:r>
+              <a:rPr lang="en-US" sz="3200"/>
+              <a:t>Use void type</a:t>
+            </a:r>
+          </a:p>
+          <a:p>
+            <a:pPr marL="742950" lvl="1" indent="-285750">
+              <a:buFont typeface="Arial" panose="020B0604020202020204" pitchFamily="34" charset="0"/>
+              <a:buChar char="•"/>
+            </a:pPr>
+            <a:r>
+              <a:rPr lang="en-US" sz="3200"/>
+              <a:t>Opps. Has driver</a:t>
+            </a:r>
+          </a:p>
+          <a:p>
+            <a:pPr lvl="1"/>
+            <a:r>
+              <a:rPr lang="en-US" sz="3200"/>
+              <a:t>license? (int?)</a:t>
+            </a:r>
+          </a:p>
+          <a:p>
+            <a:pPr marL="742950" lvl="1" indent="-285750">
+              <a:buFont typeface="Arial" panose="020B0604020202020204" pitchFamily="34" charset="0"/>
+              <a:buChar char="•"/>
+            </a:pPr>
+            <a:endParaRPr lang="en-US" sz="3200"/>
+          </a:p>
+          <a:p>
+            <a:pPr marL="742950" lvl="1" indent="-285750">
+              <a:buFont typeface="Arial" panose="020B0604020202020204" pitchFamily="34" charset="0"/>
+              <a:buChar char="•"/>
+            </a:pPr>
+            <a:endParaRPr lang="en-US" sz="3200"/>
+          </a:p>
+          <a:p>
+            <a:pPr marL="742950" lvl="1" indent="-285750">
+              <a:buFont typeface="Arial" panose="020B0604020202020204" pitchFamily="34" charset="0"/>
+              <a:buChar char="•"/>
+            </a:pPr>
+            <a:endParaRPr lang="en-US" sz="3200"/>
+          </a:p>
+        </p:txBody>
+      </p:sp>
+      <p:pic>
+        <p:nvPicPr>
+          <p:cNvPr id="5" name="Picture 4">
+            <a:extLst>
+              <a:ext uri="{FF2B5EF4-FFF2-40B4-BE49-F238E27FC236}">
+                <a16:creationId xmlns:a16="http://schemas.microsoft.com/office/drawing/2014/main" id="{8BE32D5E-D513-7424-C2EC-7D45253A78D6}"/>
+              </a:ext>
+            </a:extLst>
+          </p:cNvPr>
+          <p:cNvPicPr>
+            <a:picLocks noChangeAspect="1"/>
+          </p:cNvPicPr>
+          <p:nvPr/>
+        </p:nvPicPr>
+        <p:blipFill>
+          <a:blip r:embed="rId3"/>
+          <a:stretch>
+            <a:fillRect/>
+          </a:stretch>
+        </p:blipFill>
+        <p:spPr>
+          <a:xfrm>
+            <a:off x="4718924" y="3437626"/>
+            <a:ext cx="6325483" cy="2495898"/>
+          </a:xfrm>
+          <a:prstGeom prst="rect">
+            <a:avLst/>
+          </a:prstGeom>
+        </p:spPr>
+      </p:pic>
     </p:spTree>
     <p:extLst>
       <p:ext uri="{BB962C8B-B14F-4D97-AF65-F5344CB8AC3E}">
-        <p14:creationId xmlns:p14="http://schemas.microsoft.com/office/powerpoint/2010/main" val="4251716191"/>
+        <p14:creationId xmlns:p14="http://schemas.microsoft.com/office/powerpoint/2010/main" val="3777061713"/>
       </p:ext>
     </p:extLst>
   </p:cSld>
@@ -3274,13 +3354,7 @@
   <p:cSld>
     <p:spTree>
       <p:nvGrpSpPr>
-        <p:cNvPr id="1" name="">
-          <a:extLst>
-            <a:ext uri="{FF2B5EF4-FFF2-40B4-BE49-F238E27FC236}">
-              <a16:creationId xmlns:a16="http://schemas.microsoft.com/office/drawing/2014/main" id="{A489AF91-E8B5-C9EC-C961-C7DCFAC14852}"/>
-            </a:ext>
-          </a:extLst>
-        </p:cNvPr>
+        <p:cNvPr id="1" name=""/>
         <p:cNvGrpSpPr/>
         <p:nvPr/>
       </p:nvGrpSpPr>
@@ -3294,13 +3368,7 @@
       </p:grpSpPr>
       <p:pic>
         <p:nvPicPr>
-          <p:cNvPr id="6" name="Picture 5">
-            <a:extLst>
-              <a:ext uri="{FF2B5EF4-FFF2-40B4-BE49-F238E27FC236}">
-                <a16:creationId xmlns:a16="http://schemas.microsoft.com/office/drawing/2014/main" id="{40496F9B-9006-606B-EAC3-C0DA37C084AD}"/>
-              </a:ext>
-            </a:extLst>
-          </p:cNvPr>
+          <p:cNvPr id="6" name="Picture 5"/>
           <p:cNvPicPr>
             <a:picLocks noChangeAspect="1"/>
           </p:cNvPicPr>
@@ -3333,7 +3401,7 @@
           <p:cNvPr id="2" name="TextBox 1">
             <a:extLst>
               <a:ext uri="{FF2B5EF4-FFF2-40B4-BE49-F238E27FC236}">
-                <a16:creationId xmlns:a16="http://schemas.microsoft.com/office/drawing/2014/main" id="{A0F5AF4A-3981-DFA4-3097-E76D3175F9F7}"/>
+                <a16:creationId xmlns:a16="http://schemas.microsoft.com/office/drawing/2014/main" id="{5A78A34D-0D8C-BD88-B427-6ADAF2538448}"/>
               </a:ext>
             </a:extLst>
           </p:cNvPr>
@@ -3360,7 +3428,7 @@
           <a:p>
             <a:r>
               <a:rPr lang="en-US" sz="4000"/>
-              <a:t>Open point</a:t>
+              <a:t>Open point: use variable</a:t>
             </a:r>
           </a:p>
         </p:txBody>
@@ -3370,7 +3438,7 @@
           <p:cNvPr id="3" name="TextBox 2">
             <a:extLst>
               <a:ext uri="{FF2B5EF4-FFF2-40B4-BE49-F238E27FC236}">
-                <a16:creationId xmlns:a16="http://schemas.microsoft.com/office/drawing/2014/main" id="{C75BFA2E-E668-6386-82E6-9B52F0D0EE9D}"/>
+                <a16:creationId xmlns:a16="http://schemas.microsoft.com/office/drawing/2014/main" id="{DCD3C42D-36A3-F27E-0EA8-23CB65CCC6BB}"/>
               </a:ext>
             </a:extLst>
           </p:cNvPr>
@@ -3380,7 +3448,7 @@
         <p:spPr>
           <a:xfrm>
             <a:off x="499932" y="2305050"/>
-            <a:ext cx="10938693" cy="1077218"/>
+            <a:ext cx="10938693" cy="3046988"/>
           </a:xfrm>
           <a:prstGeom prst="rect">
             <a:avLst/>
@@ -3394,6 +3462,36 @@
             <a:spAutoFit/>
           </a:bodyPr>
           <a:lstStyle/>
+          <a:p>
+            <a:pPr marL="285750" indent="-285750">
+              <a:buFont typeface="Arial" panose="020B0604020202020204" pitchFamily="34" charset="0"/>
+              <a:buChar char="•"/>
+            </a:pPr>
+            <a:r>
+              <a:rPr lang="en-US" sz="3200"/>
+              <a:t>Compare</a:t>
+            </a:r>
+          </a:p>
+          <a:p>
+            <a:pPr marL="742950" lvl="1" indent="-285750">
+              <a:buFont typeface="Arial" panose="020B0604020202020204" pitchFamily="34" charset="0"/>
+              <a:buChar char="•"/>
+            </a:pPr>
+            <a:r>
+              <a:rPr lang="en-US" sz="3200"/>
+              <a:t>int x;</a:t>
+            </a:r>
+          </a:p>
+          <a:p>
+            <a:pPr marL="742950" lvl="1" indent="-285750">
+              <a:buFont typeface="Arial" panose="020B0604020202020204" pitchFamily="34" charset="0"/>
+              <a:buChar char="•"/>
+            </a:pPr>
+            <a:r>
+              <a:rPr lang="en-US" sz="3200"/>
+              <a:t>int x = 1;</a:t>
+            </a:r>
+          </a:p>
           <a:p>
             <a:pPr marL="457200" indent="-457200">
               <a:buFont typeface="Arial" panose="020B0604020202020204" pitchFamily="34" charset="0"/>
@@ -3401,25 +3499,29 @@
             </a:pPr>
             <a:r>
               <a:rPr lang="en-US" sz="3200"/>
-              <a:t>What is the variable?</a:t>
-            </a:r>
-          </a:p>
-          <a:p>
-            <a:pPr marL="457200" indent="-457200">
+              <a:t>Why void? When use void?</a:t>
+            </a:r>
+          </a:p>
+          <a:p>
+            <a:pPr marL="742950" lvl="1" indent="-285750">
               <a:buFont typeface="Arial" panose="020B0604020202020204" pitchFamily="34" charset="0"/>
               <a:buChar char="•"/>
             </a:pPr>
-            <a:r>
-              <a:rPr lang="en-US" sz="3200"/>
-              <a:t>Why we need variable?</a:t>
-            </a:r>
+            <a:endParaRPr lang="en-US" sz="3200"/>
+          </a:p>
+          <a:p>
+            <a:pPr marL="742950" lvl="1" indent="-285750">
+              <a:buFont typeface="Arial" panose="020B0604020202020204" pitchFamily="34" charset="0"/>
+              <a:buChar char="•"/>
+            </a:pPr>
+            <a:endParaRPr lang="en-US" sz="3200"/>
           </a:p>
         </p:txBody>
       </p:sp>
     </p:spTree>
     <p:extLst>
       <p:ext uri="{BB962C8B-B14F-4D97-AF65-F5344CB8AC3E}">
-        <p14:creationId xmlns:p14="http://schemas.microsoft.com/office/powerpoint/2010/main" val="3363289470"/>
+        <p14:creationId xmlns:p14="http://schemas.microsoft.com/office/powerpoint/2010/main" val="4090739492"/>
       </p:ext>
     </p:extLst>
   </p:cSld>
@@ -3508,6 +3610,324 @@
           <a:p>
             <a:r>
               <a:rPr lang="en-US" sz="4000"/>
+              <a:t>3. Pointer variable</a:t>
+            </a:r>
+          </a:p>
+        </p:txBody>
+      </p:sp>
+      <p:sp>
+        <p:nvSpPr>
+          <p:cNvPr id="3" name="TextBox 2">
+            <a:extLst>
+              <a:ext uri="{FF2B5EF4-FFF2-40B4-BE49-F238E27FC236}">
+                <a16:creationId xmlns:a16="http://schemas.microsoft.com/office/drawing/2014/main" id="{DCD3C42D-36A3-F27E-0EA8-23CB65CCC6BB}"/>
+              </a:ext>
+            </a:extLst>
+          </p:cNvPr>
+          <p:cNvSpPr txBox="1"/>
+          <p:nvPr/>
+        </p:nvSpPr>
+        <p:spPr>
+          <a:xfrm>
+            <a:off x="499932" y="2305050"/>
+            <a:ext cx="10938693" cy="1569660"/>
+          </a:xfrm>
+          <a:prstGeom prst="rect">
+            <a:avLst/>
+          </a:prstGeom>
+          <a:solidFill>
+            <a:srgbClr val="C8CFA0"/>
+          </a:solidFill>
+        </p:spPr>
+        <p:txBody>
+          <a:bodyPr wrap="square" rtlCol="0">
+            <a:spAutoFit/>
+          </a:bodyPr>
+          <a:lstStyle/>
+          <a:p>
+            <a:pPr marL="457200" indent="-457200">
+              <a:buFont typeface="Arial" panose="020B0604020202020204" pitchFamily="34" charset="0"/>
+              <a:buChar char="•"/>
+            </a:pPr>
+            <a:r>
+              <a:rPr lang="en-US" sz="3200"/>
+              <a:t>What is the pointer?</a:t>
+            </a:r>
+          </a:p>
+          <a:p>
+            <a:pPr marL="457200" indent="-457200">
+              <a:buFont typeface="Arial" panose="020B0604020202020204" pitchFamily="34" charset="0"/>
+              <a:buChar char="•"/>
+            </a:pPr>
+            <a:r>
+              <a:rPr lang="en-US" sz="3200"/>
+              <a:t>Does pointer has address itself?</a:t>
+            </a:r>
+          </a:p>
+          <a:p>
+            <a:pPr marL="457200" indent="-457200">
+              <a:buFont typeface="Arial" panose="020B0604020202020204" pitchFamily="34" charset="0"/>
+              <a:buChar char="•"/>
+            </a:pPr>
+            <a:r>
+              <a:rPr lang="en-US" sz="3200"/>
+              <a:t>NULL pointer</a:t>
+            </a:r>
+          </a:p>
+        </p:txBody>
+      </p:sp>
+    </p:spTree>
+    <p:extLst>
+      <p:ext uri="{BB962C8B-B14F-4D97-AF65-F5344CB8AC3E}">
+        <p14:creationId xmlns:p14="http://schemas.microsoft.com/office/powerpoint/2010/main" val="4251716191"/>
+      </p:ext>
+    </p:extLst>
+  </p:cSld>
+  <p:clrMapOvr>
+    <a:masterClrMapping/>
+  </p:clrMapOvr>
+</p:sld>
+</file>
+
+<file path=ppt/slides/slide13.xml><?xml version="1.0" encoding="utf-8"?>
+<p:sld xmlns:a="http://schemas.openxmlformats.org/drawingml/2006/main" xmlns:r="http://schemas.openxmlformats.org/officeDocument/2006/relationships" xmlns:p="http://schemas.openxmlformats.org/presentationml/2006/main">
+  <p:cSld>
+    <p:spTree>
+      <p:nvGrpSpPr>
+        <p:cNvPr id="1" name="">
+          <a:extLst>
+            <a:ext uri="{FF2B5EF4-FFF2-40B4-BE49-F238E27FC236}">
+              <a16:creationId xmlns:a16="http://schemas.microsoft.com/office/drawing/2014/main" id="{A489AF91-E8B5-C9EC-C961-C7DCFAC14852}"/>
+            </a:ext>
+          </a:extLst>
+        </p:cNvPr>
+        <p:cNvGrpSpPr/>
+        <p:nvPr/>
+      </p:nvGrpSpPr>
+      <p:grpSpPr>
+        <a:xfrm>
+          <a:off x="0" y="0"/>
+          <a:ext cx="0" cy="0"/>
+          <a:chOff x="0" y="0"/>
+          <a:chExt cx="0" cy="0"/>
+        </a:xfrm>
+      </p:grpSpPr>
+      <p:pic>
+        <p:nvPicPr>
+          <p:cNvPr id="6" name="Picture 5">
+            <a:extLst>
+              <a:ext uri="{FF2B5EF4-FFF2-40B4-BE49-F238E27FC236}">
+                <a16:creationId xmlns:a16="http://schemas.microsoft.com/office/drawing/2014/main" id="{40496F9B-9006-606B-EAC3-C0DA37C084AD}"/>
+              </a:ext>
+            </a:extLst>
+          </p:cNvPr>
+          <p:cNvPicPr>
+            <a:picLocks noChangeAspect="1"/>
+          </p:cNvPicPr>
+          <p:nvPr/>
+        </p:nvPicPr>
+        <p:blipFill>
+          <a:blip r:embed="rId2" cstate="print">
+            <a:extLst>
+              <a:ext uri="{28A0092B-C50C-407E-A947-70E740481C1C}">
+                <a14:useLocalDpi xmlns:a14="http://schemas.microsoft.com/office/drawing/2010/main" val="0"/>
+              </a:ext>
+            </a:extLst>
+          </a:blip>
+          <a:stretch>
+            <a:fillRect/>
+          </a:stretch>
+        </p:blipFill>
+        <p:spPr>
+          <a:xfrm>
+            <a:off x="-117663" y="-89806"/>
+            <a:ext cx="12277005" cy="1420585"/>
+          </a:xfrm>
+          <a:prstGeom prst="rect">
+            <a:avLst/>
+          </a:prstGeom>
+        </p:spPr>
+      </p:pic>
+      <p:sp>
+        <p:nvSpPr>
+          <p:cNvPr id="2" name="TextBox 1">
+            <a:extLst>
+              <a:ext uri="{FF2B5EF4-FFF2-40B4-BE49-F238E27FC236}">
+                <a16:creationId xmlns:a16="http://schemas.microsoft.com/office/drawing/2014/main" id="{A0F5AF4A-3981-DFA4-3097-E76D3175F9F7}"/>
+              </a:ext>
+            </a:extLst>
+          </p:cNvPr>
+          <p:cNvSpPr txBox="1"/>
+          <p:nvPr/>
+        </p:nvSpPr>
+        <p:spPr>
+          <a:xfrm>
+            <a:off x="499933" y="1406106"/>
+            <a:ext cx="5520906" cy="707886"/>
+          </a:xfrm>
+          <a:prstGeom prst="rect">
+            <a:avLst/>
+          </a:prstGeom>
+          <a:solidFill>
+            <a:srgbClr val="EF9C66"/>
+          </a:solidFill>
+        </p:spPr>
+        <p:txBody>
+          <a:bodyPr wrap="square" rtlCol="0">
+            <a:spAutoFit/>
+          </a:bodyPr>
+          <a:lstStyle/>
+          <a:p>
+            <a:r>
+              <a:rPr lang="en-US" sz="4000"/>
+              <a:t>Open point</a:t>
+            </a:r>
+          </a:p>
+        </p:txBody>
+      </p:sp>
+      <p:sp>
+        <p:nvSpPr>
+          <p:cNvPr id="3" name="TextBox 2">
+            <a:extLst>
+              <a:ext uri="{FF2B5EF4-FFF2-40B4-BE49-F238E27FC236}">
+                <a16:creationId xmlns:a16="http://schemas.microsoft.com/office/drawing/2014/main" id="{C75BFA2E-E668-6386-82E6-9B52F0D0EE9D}"/>
+              </a:ext>
+            </a:extLst>
+          </p:cNvPr>
+          <p:cNvSpPr txBox="1"/>
+          <p:nvPr/>
+        </p:nvSpPr>
+        <p:spPr>
+          <a:xfrm>
+            <a:off x="499932" y="2305050"/>
+            <a:ext cx="10938693" cy="1077218"/>
+          </a:xfrm>
+          <a:prstGeom prst="rect">
+            <a:avLst/>
+          </a:prstGeom>
+          <a:solidFill>
+            <a:srgbClr val="C8CFA0"/>
+          </a:solidFill>
+        </p:spPr>
+        <p:txBody>
+          <a:bodyPr wrap="square" rtlCol="0">
+            <a:spAutoFit/>
+          </a:bodyPr>
+          <a:lstStyle/>
+          <a:p>
+            <a:pPr marL="457200" indent="-457200">
+              <a:buFont typeface="Arial" panose="020B0604020202020204" pitchFamily="34" charset="0"/>
+              <a:buChar char="•"/>
+            </a:pPr>
+            <a:r>
+              <a:rPr lang="en-US" sz="3200"/>
+              <a:t>What is the variable?</a:t>
+            </a:r>
+          </a:p>
+          <a:p>
+            <a:pPr marL="457200" indent="-457200">
+              <a:buFont typeface="Arial" panose="020B0604020202020204" pitchFamily="34" charset="0"/>
+              <a:buChar char="•"/>
+            </a:pPr>
+            <a:r>
+              <a:rPr lang="en-US" sz="3200"/>
+              <a:t>Why we need variable?</a:t>
+            </a:r>
+          </a:p>
+        </p:txBody>
+      </p:sp>
+    </p:spTree>
+    <p:extLst>
+      <p:ext uri="{BB962C8B-B14F-4D97-AF65-F5344CB8AC3E}">
+        <p14:creationId xmlns:p14="http://schemas.microsoft.com/office/powerpoint/2010/main" val="3363289470"/>
+      </p:ext>
+    </p:extLst>
+  </p:cSld>
+  <p:clrMapOvr>
+    <a:masterClrMapping/>
+  </p:clrMapOvr>
+</p:sld>
+</file>
+
+<file path=ppt/slides/slide14.xml><?xml version="1.0" encoding="utf-8"?>
+<p:sld xmlns:a="http://schemas.openxmlformats.org/drawingml/2006/main" xmlns:r="http://schemas.openxmlformats.org/officeDocument/2006/relationships" xmlns:p="http://schemas.openxmlformats.org/presentationml/2006/main">
+  <p:cSld>
+    <p:spTree>
+      <p:nvGrpSpPr>
+        <p:cNvPr id="1" name=""/>
+        <p:cNvGrpSpPr/>
+        <p:nvPr/>
+      </p:nvGrpSpPr>
+      <p:grpSpPr>
+        <a:xfrm>
+          <a:off x="0" y="0"/>
+          <a:ext cx="0" cy="0"/>
+          <a:chOff x="0" y="0"/>
+          <a:chExt cx="0" cy="0"/>
+        </a:xfrm>
+      </p:grpSpPr>
+      <p:pic>
+        <p:nvPicPr>
+          <p:cNvPr id="6" name="Picture 5"/>
+          <p:cNvPicPr>
+            <a:picLocks noChangeAspect="1"/>
+          </p:cNvPicPr>
+          <p:nvPr/>
+        </p:nvPicPr>
+        <p:blipFill>
+          <a:blip r:embed="rId2" cstate="print">
+            <a:extLst>
+              <a:ext uri="{28A0092B-C50C-407E-A947-70E740481C1C}">
+                <a14:useLocalDpi xmlns:a14="http://schemas.microsoft.com/office/drawing/2010/main" val="0"/>
+              </a:ext>
+            </a:extLst>
+          </a:blip>
+          <a:stretch>
+            <a:fillRect/>
+          </a:stretch>
+        </p:blipFill>
+        <p:spPr>
+          <a:xfrm>
+            <a:off x="-117663" y="-89806"/>
+            <a:ext cx="12277005" cy="1420585"/>
+          </a:xfrm>
+          <a:prstGeom prst="rect">
+            <a:avLst/>
+          </a:prstGeom>
+        </p:spPr>
+      </p:pic>
+      <p:sp>
+        <p:nvSpPr>
+          <p:cNvPr id="2" name="TextBox 1">
+            <a:extLst>
+              <a:ext uri="{FF2B5EF4-FFF2-40B4-BE49-F238E27FC236}">
+                <a16:creationId xmlns:a16="http://schemas.microsoft.com/office/drawing/2014/main" id="{5A78A34D-0D8C-BD88-B427-6ADAF2538448}"/>
+              </a:ext>
+            </a:extLst>
+          </p:cNvPr>
+          <p:cNvSpPr txBox="1"/>
+          <p:nvPr/>
+        </p:nvSpPr>
+        <p:spPr>
+          <a:xfrm>
+            <a:off x="499933" y="1406106"/>
+            <a:ext cx="5520906" cy="707886"/>
+          </a:xfrm>
+          <a:prstGeom prst="rect">
+            <a:avLst/>
+          </a:prstGeom>
+          <a:solidFill>
+            <a:srgbClr val="EF9C66"/>
+          </a:solidFill>
+        </p:spPr>
+        <p:txBody>
+          <a:bodyPr wrap="square" rtlCol="0">
+            <a:spAutoFit/>
+          </a:bodyPr>
+          <a:lstStyle/>
+          <a:p>
+            <a:r>
+              <a:rPr lang="en-US" sz="4000"/>
               <a:t>6. Q&amp;A</a:t>
             </a:r>
           </a:p>
@@ -3590,42 +4010,143 @@
           <a:chExt cx="0" cy="0"/>
         </a:xfrm>
       </p:grpSpPr>
-      <p:pic>
-        <p:nvPicPr>
-          <p:cNvPr id="6" name="Picture 5"/>
-          <p:cNvPicPr>
-            <a:picLocks noChangeAspect="1"/>
-          </p:cNvPicPr>
+      <p:sp>
+        <p:nvSpPr>
+          <p:cNvPr id="4" name="Rectangle 3">
+            <a:extLst>
+              <a:ext uri="{FF2B5EF4-FFF2-40B4-BE49-F238E27FC236}">
+                <a16:creationId xmlns:a16="http://schemas.microsoft.com/office/drawing/2014/main" id="{64AD1A1C-533F-F301-8A28-6DBA698AFAF2}"/>
+              </a:ext>
+            </a:extLst>
+          </p:cNvPr>
+          <p:cNvSpPr/>
           <p:nvPr/>
-        </p:nvPicPr>
-        <p:blipFill>
-          <a:blip r:embed="rId2" cstate="print">
-            <a:extLst>
-              <a:ext uri="{28A0092B-C50C-407E-A947-70E740481C1C}">
-                <a14:useLocalDpi xmlns:a14="http://schemas.microsoft.com/office/drawing/2010/main" val="0"/>
-              </a:ext>
-            </a:extLst>
-          </a:blip>
-          <a:stretch>
-            <a:fillRect/>
-          </a:stretch>
-        </p:blipFill>
-        <p:spPr>
-          <a:xfrm>
-            <a:off x="-117663" y="-89806"/>
-            <a:ext cx="12277005" cy="1420585"/>
+        </p:nvSpPr>
+        <p:spPr>
+          <a:xfrm>
+            <a:off x="4421293" y="1367323"/>
+            <a:ext cx="3657600" cy="2333904"/>
           </a:xfrm>
           <a:prstGeom prst="rect">
             <a:avLst/>
           </a:prstGeom>
         </p:spPr>
-      </p:pic>
-      <p:sp>
-        <p:nvSpPr>
-          <p:cNvPr id="2" name="TextBox 1">
+        <p:style>
+          <a:lnRef idx="2">
+            <a:schemeClr val="accent1">
+              <a:shade val="15000"/>
+            </a:schemeClr>
+          </a:lnRef>
+          <a:fillRef idx="1">
+            <a:schemeClr val="accent1"/>
+          </a:fillRef>
+          <a:effectRef idx="0">
+            <a:schemeClr val="accent1"/>
+          </a:effectRef>
+          <a:fontRef idx="minor">
+            <a:schemeClr val="lt1"/>
+          </a:fontRef>
+        </p:style>
+        <p:txBody>
+          <a:bodyPr rtlCol="0" anchor="ctr"/>
+          <a:lstStyle/>
+          <a:p>
+            <a:pPr algn="ctr"/>
+            <a:r>
+              <a:rPr lang="en-US" dirty="0"/>
+              <a:t>main</a:t>
+            </a:r>
+          </a:p>
+        </p:txBody>
+      </p:sp>
+      <p:cxnSp>
+        <p:nvCxnSpPr>
+          <p:cNvPr id="6" name="Straight Arrow Connector 5">
             <a:extLst>
               <a:ext uri="{FF2B5EF4-FFF2-40B4-BE49-F238E27FC236}">
-                <a16:creationId xmlns:a16="http://schemas.microsoft.com/office/drawing/2014/main" id="{5A78A34D-0D8C-BD88-B427-6ADAF2538448}"/>
+                <a16:creationId xmlns:a16="http://schemas.microsoft.com/office/drawing/2014/main" id="{8EF800AF-B293-DE59-4F23-9191B2FC5FDC}"/>
+              </a:ext>
+            </a:extLst>
+          </p:cNvPr>
+          <p:cNvCxnSpPr>
+            <a:cxnSpLocks/>
+          </p:cNvCxnSpPr>
+          <p:nvPr/>
+        </p:nvCxnSpPr>
+        <p:spPr>
+          <a:xfrm flipV="1">
+            <a:off x="2462106" y="2048933"/>
+            <a:ext cx="1910080" cy="30480"/>
+          </a:xfrm>
+          <a:prstGeom prst="straightConnector1">
+            <a:avLst/>
+          </a:prstGeom>
+          <a:ln>
+            <a:tailEnd type="triangle"/>
+          </a:ln>
+        </p:spPr>
+        <p:style>
+          <a:lnRef idx="3">
+            <a:schemeClr val="accent2"/>
+          </a:lnRef>
+          <a:fillRef idx="0">
+            <a:schemeClr val="accent2"/>
+          </a:fillRef>
+          <a:effectRef idx="2">
+            <a:schemeClr val="accent2"/>
+          </a:effectRef>
+          <a:fontRef idx="minor">
+            <a:schemeClr val="tx1"/>
+          </a:fontRef>
+        </p:style>
+      </p:cxnSp>
+      <p:cxnSp>
+        <p:nvCxnSpPr>
+          <p:cNvPr id="8" name="Straight Arrow Connector 7">
+            <a:extLst>
+              <a:ext uri="{FF2B5EF4-FFF2-40B4-BE49-F238E27FC236}">
+                <a16:creationId xmlns:a16="http://schemas.microsoft.com/office/drawing/2014/main" id="{7F878709-DFED-52DD-A862-AA2C47317DEB}"/>
+              </a:ext>
+            </a:extLst>
+          </p:cNvPr>
+          <p:cNvCxnSpPr>
+            <a:cxnSpLocks/>
+          </p:cNvCxnSpPr>
+          <p:nvPr/>
+        </p:nvCxnSpPr>
+        <p:spPr>
+          <a:xfrm flipV="1">
+            <a:off x="7623386" y="2079413"/>
+            <a:ext cx="2987040" cy="71120"/>
+          </a:xfrm>
+          <a:prstGeom prst="straightConnector1">
+            <a:avLst/>
+          </a:prstGeom>
+          <a:ln>
+            <a:tailEnd type="triangle"/>
+          </a:ln>
+        </p:spPr>
+        <p:style>
+          <a:lnRef idx="3">
+            <a:schemeClr val="accent2"/>
+          </a:lnRef>
+          <a:fillRef idx="0">
+            <a:schemeClr val="accent2"/>
+          </a:fillRef>
+          <a:effectRef idx="2">
+            <a:schemeClr val="accent2"/>
+          </a:effectRef>
+          <a:fontRef idx="minor">
+            <a:schemeClr val="tx1"/>
+          </a:fontRef>
+        </p:style>
+      </p:cxnSp>
+      <p:sp>
+        <p:nvSpPr>
+          <p:cNvPr id="9" name="TextBox 8">
+            <a:extLst>
+              <a:ext uri="{FF2B5EF4-FFF2-40B4-BE49-F238E27FC236}">
+                <a16:creationId xmlns:a16="http://schemas.microsoft.com/office/drawing/2014/main" id="{4B2C00F0-422D-2EB1-8CD5-3ACC114F2301}"/>
               </a:ext>
             </a:extLst>
           </p:cNvPr>
@@ -3634,15 +4155,13 @@
         </p:nvSpPr>
         <p:spPr>
           <a:xfrm>
-            <a:off x="499933" y="1406106"/>
-            <a:ext cx="5520906" cy="707886"/>
+            <a:off x="1206499" y="1386126"/>
+            <a:ext cx="1432560" cy="369332"/>
           </a:xfrm>
           <a:prstGeom prst="rect">
             <a:avLst/>
           </a:prstGeom>
-          <a:solidFill>
-            <a:srgbClr val="EF9C66"/>
-          </a:solidFill>
+          <a:noFill/>
         </p:spPr>
         <p:txBody>
           <a:bodyPr wrap="square" rtlCol="0">
@@ -3651,18 +4170,18 @@
           <a:lstStyle/>
           <a:p>
             <a:r>
-              <a:rPr lang="en-US" sz="4000"/>
-              <a:t>1. Introduction</a:t>
-            </a:r>
-          </a:p>
-        </p:txBody>
-      </p:sp>
-      <p:sp>
-        <p:nvSpPr>
-          <p:cNvPr id="3" name="TextBox 2">
+              <a:rPr lang="en-US" dirty="0"/>
+              <a:t>INPUT</a:t>
+            </a:r>
+          </a:p>
+        </p:txBody>
+      </p:sp>
+      <p:sp>
+        <p:nvSpPr>
+          <p:cNvPr id="10" name="TextBox 9">
             <a:extLst>
               <a:ext uri="{FF2B5EF4-FFF2-40B4-BE49-F238E27FC236}">
-                <a16:creationId xmlns:a16="http://schemas.microsoft.com/office/drawing/2014/main" id="{DCD3C42D-36A3-F27E-0EA8-23CB65CCC6BB}"/>
+                <a16:creationId xmlns:a16="http://schemas.microsoft.com/office/drawing/2014/main" id="{1235AD39-0365-5BD7-00C8-22D55B27D699}"/>
               </a:ext>
             </a:extLst>
           </p:cNvPr>
@@ -3671,15 +4190,13 @@
         </p:nvSpPr>
         <p:spPr>
           <a:xfrm>
-            <a:off x="499932" y="2305050"/>
-            <a:ext cx="10938693" cy="3539430"/>
+            <a:off x="8400626" y="1337733"/>
+            <a:ext cx="1432560" cy="923330"/>
           </a:xfrm>
           <a:prstGeom prst="rect">
             <a:avLst/>
           </a:prstGeom>
-          <a:solidFill>
-            <a:srgbClr val="C8CFA0"/>
-          </a:solidFill>
+          <a:noFill/>
         </p:spPr>
         <p:txBody>
           <a:bodyPr wrap="square" rtlCol="0">
@@ -3687,115 +4204,491 @@
           </a:bodyPr>
           <a:lstStyle/>
           <a:p>
-            <a:pPr marL="285750" indent="-285750">
-              <a:buFont typeface="Arial" panose="020B0604020202020204" pitchFamily="34" charset="0"/>
-              <a:buChar char="•"/>
-            </a:pPr>
-            <a:r>
-              <a:rPr lang="en-US" sz="3200"/>
-              <a:t>Syntax</a:t>
-            </a:r>
-          </a:p>
-          <a:p>
-            <a:pPr marL="285750" indent="-285750">
-              <a:buFont typeface="Arial" panose="020B0604020202020204" pitchFamily="34" charset="0"/>
-              <a:buChar char="•"/>
-            </a:pPr>
-            <a:endParaRPr lang="en-US" sz="3200"/>
-          </a:p>
-          <a:p>
-            <a:endParaRPr lang="en-US" sz="3200"/>
-          </a:p>
-          <a:p>
-            <a:pPr marL="285750" indent="-285750">
-              <a:buFont typeface="Arial" panose="020B0604020202020204" pitchFamily="34" charset="0"/>
-              <a:buChar char="•"/>
-            </a:pPr>
-            <a:endParaRPr lang="en-US" sz="3200"/>
-          </a:p>
-          <a:p>
-            <a:pPr marL="285750" indent="-285750">
-              <a:buFont typeface="Arial" panose="020B0604020202020204" pitchFamily="34" charset="0"/>
-              <a:buChar char="•"/>
-            </a:pPr>
-            <a:endParaRPr lang="en-US" sz="3200"/>
-          </a:p>
-          <a:p>
-            <a:pPr marL="285750" indent="-285750">
-              <a:buFont typeface="Arial" panose="020B0604020202020204" pitchFamily="34" charset="0"/>
-              <a:buChar char="•"/>
-            </a:pPr>
-            <a:endParaRPr lang="en-US" sz="3200"/>
-          </a:p>
-          <a:p>
-            <a:endParaRPr lang="en-US" sz="3200"/>
-          </a:p>
-        </p:txBody>
-      </p:sp>
-      <p:pic>
-        <p:nvPicPr>
-          <p:cNvPr id="5" name="Picture 4">
+            <a:r>
+              <a:rPr lang="en-US" dirty="0"/>
+              <a:t>OUTPUT</a:t>
+            </a:r>
+          </a:p>
+          <a:p>
+            <a:r>
+              <a:rPr lang="en-US" dirty="0" err="1"/>
+              <a:t>printf</a:t>
+            </a:r>
+            <a:endParaRPr lang="en-US" dirty="0"/>
+          </a:p>
+          <a:p>
+            <a:endParaRPr lang="en-US" dirty="0"/>
+          </a:p>
+        </p:txBody>
+      </p:sp>
+      <p:sp>
+        <p:nvSpPr>
+          <p:cNvPr id="11" name="Rectangle 10">
             <a:extLst>
               <a:ext uri="{FF2B5EF4-FFF2-40B4-BE49-F238E27FC236}">
-                <a16:creationId xmlns:a16="http://schemas.microsoft.com/office/drawing/2014/main" id="{71881EBF-197E-D1E0-2EC0-3B6562725A59}"/>
+                <a16:creationId xmlns:a16="http://schemas.microsoft.com/office/drawing/2014/main" id="{7C36CFA4-37F2-5194-6A62-329F72C01091}"/>
               </a:ext>
             </a:extLst>
           </p:cNvPr>
-          <p:cNvPicPr>
-            <a:picLocks noChangeAspect="1"/>
-          </p:cNvPicPr>
+          <p:cNvSpPr/>
           <p:nvPr/>
-        </p:nvPicPr>
-        <p:blipFill>
-          <a:blip r:embed="rId3"/>
-          <a:stretch>
-            <a:fillRect/>
-          </a:stretch>
-        </p:blipFill>
-        <p:spPr>
-          <a:xfrm>
-            <a:off x="4675442" y="2815629"/>
-            <a:ext cx="6246209" cy="2939659"/>
+        </p:nvSpPr>
+        <p:spPr>
+          <a:xfrm>
+            <a:off x="5103705" y="1929692"/>
+            <a:ext cx="1935057" cy="1650014"/>
           </a:xfrm>
           <a:prstGeom prst="rect">
             <a:avLst/>
           </a:prstGeom>
         </p:spPr>
-      </p:pic>
-      <p:pic>
-        <p:nvPicPr>
-          <p:cNvPr id="8" name="Picture 7">
+        <p:style>
+          <a:lnRef idx="3">
+            <a:schemeClr val="lt1"/>
+          </a:lnRef>
+          <a:fillRef idx="1">
+            <a:schemeClr val="accent2"/>
+          </a:fillRef>
+          <a:effectRef idx="1">
+            <a:schemeClr val="accent2"/>
+          </a:effectRef>
+          <a:fontRef idx="minor">
+            <a:schemeClr val="lt1"/>
+          </a:fontRef>
+        </p:style>
+        <p:txBody>
+          <a:bodyPr rtlCol="0" anchor="ctr"/>
+          <a:lstStyle/>
+          <a:p>
+            <a:pPr algn="ctr"/>
+            <a:r>
+              <a:rPr lang="en-US" dirty="0" err="1"/>
+              <a:t>So_nguyen</a:t>
+            </a:r>
+            <a:endParaRPr lang="en-US" dirty="0"/>
+          </a:p>
+          <a:p>
+            <a:pPr algn="ctr"/>
+            <a:endParaRPr lang="en-US" dirty="0"/>
+          </a:p>
+          <a:p>
+            <a:pPr algn="ctr"/>
+            <a:r>
+              <a:rPr lang="en-US" dirty="0"/>
+              <a:t>%d</a:t>
+            </a:r>
+          </a:p>
+          <a:p>
+            <a:pPr algn="ctr"/>
+            <a:r>
+              <a:rPr lang="en-US" dirty="0"/>
+              <a:t>%c</a:t>
+            </a:r>
+          </a:p>
+          <a:p>
+            <a:pPr algn="ctr"/>
+            <a:endParaRPr lang="en-US" dirty="0"/>
+          </a:p>
+        </p:txBody>
+      </p:sp>
+      <p:cxnSp>
+        <p:nvCxnSpPr>
+          <p:cNvPr id="13" name="Straight Arrow Connector 12">
             <a:extLst>
               <a:ext uri="{FF2B5EF4-FFF2-40B4-BE49-F238E27FC236}">
-                <a16:creationId xmlns:a16="http://schemas.microsoft.com/office/drawing/2014/main" id="{03181CFF-9895-56DC-2253-CB59D5D28464}"/>
+                <a16:creationId xmlns:a16="http://schemas.microsoft.com/office/drawing/2014/main" id="{9673648E-C247-EB4F-6636-E3C7582F58AD}"/>
               </a:ext>
             </a:extLst>
           </p:cNvPr>
-          <p:cNvPicPr>
-            <a:picLocks noChangeAspect="1"/>
-          </p:cNvPicPr>
+          <p:cNvCxnSpPr>
+            <a:cxnSpLocks/>
+          </p:cNvCxnSpPr>
           <p:nvPr/>
-        </p:nvPicPr>
-        <p:blipFill>
-          <a:blip r:embed="rId4"/>
-          <a:stretch>
-            <a:fillRect/>
-          </a:stretch>
-        </p:blipFill>
-        <p:spPr>
-          <a:xfrm>
-            <a:off x="1139636" y="3429000"/>
-            <a:ext cx="3181794" cy="2191056"/>
+        </p:nvCxnSpPr>
+        <p:spPr>
+          <a:xfrm flipH="1">
+            <a:off x="1495215" y="1848909"/>
+            <a:ext cx="465879" cy="3225606"/>
+          </a:xfrm>
+          <a:prstGeom prst="straightConnector1">
+            <a:avLst/>
+          </a:prstGeom>
+          <a:ln>
+            <a:tailEnd type="triangle"/>
+          </a:ln>
+        </p:spPr>
+        <p:style>
+          <a:lnRef idx="3">
+            <a:schemeClr val="dk1"/>
+          </a:lnRef>
+          <a:fillRef idx="0">
+            <a:schemeClr val="dk1"/>
+          </a:fillRef>
+          <a:effectRef idx="2">
+            <a:schemeClr val="dk1"/>
+          </a:effectRef>
+          <a:fontRef idx="minor">
+            <a:schemeClr val="tx1"/>
+          </a:fontRef>
+        </p:style>
+      </p:cxnSp>
+      <p:cxnSp>
+        <p:nvCxnSpPr>
+          <p:cNvPr id="15" name="Straight Connector 14">
+            <a:extLst>
+              <a:ext uri="{FF2B5EF4-FFF2-40B4-BE49-F238E27FC236}">
+                <a16:creationId xmlns:a16="http://schemas.microsoft.com/office/drawing/2014/main" id="{BDD94CB3-470F-8F13-566C-FB47F1BAD6D4}"/>
+              </a:ext>
+            </a:extLst>
+          </p:cNvPr>
+          <p:cNvCxnSpPr>
+            <a:cxnSpLocks/>
+          </p:cNvCxnSpPr>
+          <p:nvPr/>
+        </p:nvCxnSpPr>
+        <p:spPr>
+          <a:xfrm>
+            <a:off x="1350432" y="4514239"/>
+            <a:ext cx="3496734" cy="71642"/>
+          </a:xfrm>
+          <a:prstGeom prst="line">
+            <a:avLst/>
+          </a:prstGeom>
+        </p:spPr>
+        <p:style>
+          <a:lnRef idx="3">
+            <a:schemeClr val="accent6"/>
+          </a:lnRef>
+          <a:fillRef idx="0">
+            <a:schemeClr val="accent6"/>
+          </a:fillRef>
+          <a:effectRef idx="2">
+            <a:schemeClr val="accent6"/>
+          </a:effectRef>
+          <a:fontRef idx="minor">
+            <a:schemeClr val="tx1"/>
+          </a:fontRef>
+        </p:style>
+      </p:cxnSp>
+      <p:cxnSp>
+        <p:nvCxnSpPr>
+          <p:cNvPr id="17" name="Straight Connector 16">
+            <a:extLst>
+              <a:ext uri="{FF2B5EF4-FFF2-40B4-BE49-F238E27FC236}">
+                <a16:creationId xmlns:a16="http://schemas.microsoft.com/office/drawing/2014/main" id="{748EFC38-28CA-62A4-92B7-CFE782A3315C}"/>
+              </a:ext>
+            </a:extLst>
+          </p:cNvPr>
+          <p:cNvCxnSpPr>
+            <a:cxnSpLocks/>
+          </p:cNvCxnSpPr>
+          <p:nvPr/>
+        </p:nvCxnSpPr>
+        <p:spPr>
+          <a:xfrm>
+            <a:off x="1206499" y="5405769"/>
+            <a:ext cx="3496734" cy="67733"/>
+          </a:xfrm>
+          <a:prstGeom prst="line">
+            <a:avLst/>
+          </a:prstGeom>
+        </p:spPr>
+        <p:style>
+          <a:lnRef idx="3">
+            <a:schemeClr val="accent6"/>
+          </a:lnRef>
+          <a:fillRef idx="0">
+            <a:schemeClr val="accent6"/>
+          </a:fillRef>
+          <a:effectRef idx="2">
+            <a:schemeClr val="accent6"/>
+          </a:effectRef>
+          <a:fontRef idx="minor">
+            <a:schemeClr val="tx1"/>
+          </a:fontRef>
+        </p:style>
+      </p:cxnSp>
+      <p:sp>
+        <p:nvSpPr>
+          <p:cNvPr id="22" name="Rectangle 21">
+            <a:extLst>
+              <a:ext uri="{FF2B5EF4-FFF2-40B4-BE49-F238E27FC236}">
+                <a16:creationId xmlns:a16="http://schemas.microsoft.com/office/drawing/2014/main" id="{3A8698A3-CD84-8632-9DF7-B9D00E3B4266}"/>
+              </a:ext>
+            </a:extLst>
+          </p:cNvPr>
+          <p:cNvSpPr/>
+          <p:nvPr/>
+        </p:nvSpPr>
+        <p:spPr>
+          <a:xfrm>
+            <a:off x="4132579" y="4922115"/>
+            <a:ext cx="479213" cy="381000"/>
           </a:xfrm>
           <a:prstGeom prst="rect">
             <a:avLst/>
           </a:prstGeom>
         </p:spPr>
-      </p:pic>
+        <p:style>
+          <a:lnRef idx="1">
+            <a:schemeClr val="accent6"/>
+          </a:lnRef>
+          <a:fillRef idx="3">
+            <a:schemeClr val="accent6"/>
+          </a:fillRef>
+          <a:effectRef idx="2">
+            <a:schemeClr val="accent6"/>
+          </a:effectRef>
+          <a:fontRef idx="minor">
+            <a:schemeClr val="lt1"/>
+          </a:fontRef>
+        </p:style>
+        <p:txBody>
+          <a:bodyPr rtlCol="0" anchor="ctr"/>
+          <a:lstStyle/>
+          <a:p>
+            <a:pPr algn="ctr"/>
+            <a:r>
+              <a:rPr lang="en-US" dirty="0"/>
+              <a:t>3</a:t>
+            </a:r>
+          </a:p>
+        </p:txBody>
+      </p:sp>
+      <p:sp>
+        <p:nvSpPr>
+          <p:cNvPr id="24" name="Rectangle 23">
+            <a:extLst>
+              <a:ext uri="{FF2B5EF4-FFF2-40B4-BE49-F238E27FC236}">
+                <a16:creationId xmlns:a16="http://schemas.microsoft.com/office/drawing/2014/main" id="{B3386115-D363-FE72-12F2-9F7FB9613E84}"/>
+              </a:ext>
+            </a:extLst>
+          </p:cNvPr>
+          <p:cNvSpPr/>
+          <p:nvPr/>
+        </p:nvSpPr>
+        <p:spPr>
+          <a:xfrm>
+            <a:off x="3037840" y="2669496"/>
+            <a:ext cx="872067" cy="434601"/>
+          </a:xfrm>
+          <a:prstGeom prst="rect">
+            <a:avLst/>
+          </a:prstGeom>
+        </p:spPr>
+        <p:style>
+          <a:lnRef idx="2">
+            <a:schemeClr val="accent1">
+              <a:shade val="15000"/>
+            </a:schemeClr>
+          </a:lnRef>
+          <a:fillRef idx="1">
+            <a:schemeClr val="accent1"/>
+          </a:fillRef>
+          <a:effectRef idx="0">
+            <a:schemeClr val="accent1"/>
+          </a:effectRef>
+          <a:fontRef idx="minor">
+            <a:schemeClr val="lt1"/>
+          </a:fontRef>
+        </p:style>
+        <p:txBody>
+          <a:bodyPr rtlCol="0" anchor="ctr"/>
+          <a:lstStyle/>
+          <a:p>
+            <a:pPr algn="ctr"/>
+            <a:r>
+              <a:rPr lang="en-US" dirty="0" err="1"/>
+              <a:t>scanf</a:t>
+            </a:r>
+            <a:endParaRPr lang="en-US" dirty="0"/>
+          </a:p>
+        </p:txBody>
+      </p:sp>
+      <p:cxnSp>
+        <p:nvCxnSpPr>
+          <p:cNvPr id="30" name="Straight Arrow Connector 29">
+            <a:extLst>
+              <a:ext uri="{FF2B5EF4-FFF2-40B4-BE49-F238E27FC236}">
+                <a16:creationId xmlns:a16="http://schemas.microsoft.com/office/drawing/2014/main" id="{B244E639-CF19-04E6-5C16-602F764985C4}"/>
+              </a:ext>
+            </a:extLst>
+          </p:cNvPr>
+          <p:cNvCxnSpPr/>
+          <p:nvPr/>
+        </p:nvCxnSpPr>
+        <p:spPr>
+          <a:xfrm flipV="1">
+            <a:off x="4190999" y="2150533"/>
+            <a:ext cx="1921934" cy="1742440"/>
+          </a:xfrm>
+          <a:prstGeom prst="straightConnector1">
+            <a:avLst/>
+          </a:prstGeom>
+          <a:ln>
+            <a:tailEnd type="triangle"/>
+          </a:ln>
+        </p:spPr>
+        <p:style>
+          <a:lnRef idx="3">
+            <a:schemeClr val="accent1"/>
+          </a:lnRef>
+          <a:fillRef idx="0">
+            <a:schemeClr val="accent1"/>
+          </a:fillRef>
+          <a:effectRef idx="2">
+            <a:schemeClr val="accent1"/>
+          </a:effectRef>
+          <a:fontRef idx="minor">
+            <a:schemeClr val="tx1"/>
+          </a:fontRef>
+        </p:style>
+      </p:cxnSp>
+      <p:sp>
+        <p:nvSpPr>
+          <p:cNvPr id="32" name="Rectangle 31">
+            <a:extLst>
+              <a:ext uri="{FF2B5EF4-FFF2-40B4-BE49-F238E27FC236}">
+                <a16:creationId xmlns:a16="http://schemas.microsoft.com/office/drawing/2014/main" id="{6E7A7532-69D3-7957-7CA4-E68B59301A97}"/>
+              </a:ext>
+            </a:extLst>
+          </p:cNvPr>
+          <p:cNvSpPr/>
+          <p:nvPr/>
+        </p:nvSpPr>
+        <p:spPr>
+          <a:xfrm>
+            <a:off x="3307081" y="4922115"/>
+            <a:ext cx="479213" cy="381000"/>
+          </a:xfrm>
+          <a:prstGeom prst="rect">
+            <a:avLst/>
+          </a:prstGeom>
+        </p:spPr>
+        <p:style>
+          <a:lnRef idx="1">
+            <a:schemeClr val="accent6"/>
+          </a:lnRef>
+          <a:fillRef idx="3">
+            <a:schemeClr val="accent6"/>
+          </a:fillRef>
+          <a:effectRef idx="2">
+            <a:schemeClr val="accent6"/>
+          </a:effectRef>
+          <a:fontRef idx="minor">
+            <a:schemeClr val="lt1"/>
+          </a:fontRef>
+        </p:style>
+        <p:txBody>
+          <a:bodyPr rtlCol="0" anchor="ctr"/>
+          <a:lstStyle/>
+          <a:p>
+            <a:pPr algn="ctr"/>
+            <a:r>
+              <a:rPr lang="en-US" dirty="0"/>
+              <a:t>e</a:t>
+            </a:r>
+          </a:p>
+        </p:txBody>
+      </p:sp>
+      <p:sp>
+        <p:nvSpPr>
+          <p:cNvPr id="33" name="Rectangle 32">
+            <a:extLst>
+              <a:ext uri="{FF2B5EF4-FFF2-40B4-BE49-F238E27FC236}">
+                <a16:creationId xmlns:a16="http://schemas.microsoft.com/office/drawing/2014/main" id="{624DBB05-E7AD-D8AE-3264-DF9E71D330AD}"/>
+              </a:ext>
+            </a:extLst>
+          </p:cNvPr>
+          <p:cNvSpPr/>
+          <p:nvPr/>
+        </p:nvSpPr>
+        <p:spPr>
+          <a:xfrm>
+            <a:off x="2482428" y="4845915"/>
+            <a:ext cx="499532" cy="457200"/>
+          </a:xfrm>
+          <a:prstGeom prst="rect">
+            <a:avLst/>
+          </a:prstGeom>
+        </p:spPr>
+        <p:style>
+          <a:lnRef idx="3">
+            <a:schemeClr val="lt1"/>
+          </a:lnRef>
+          <a:fillRef idx="1">
+            <a:schemeClr val="accent6"/>
+          </a:fillRef>
+          <a:effectRef idx="1">
+            <a:schemeClr val="accent6"/>
+          </a:effectRef>
+          <a:fontRef idx="minor">
+            <a:schemeClr val="lt1"/>
+          </a:fontRef>
+        </p:style>
+        <p:txBody>
+          <a:bodyPr rtlCol="0" anchor="ctr"/>
+          <a:lstStyle/>
+          <a:p>
+            <a:pPr algn="ctr"/>
+            <a:r>
+              <a:rPr lang="en-US" dirty="0"/>
+              <a:t>I</a:t>
+            </a:r>
+          </a:p>
+        </p:txBody>
+      </p:sp>
+      <p:sp>
+        <p:nvSpPr>
+          <p:cNvPr id="34" name="Rectangle 33">
+            <a:extLst>
+              <a:ext uri="{FF2B5EF4-FFF2-40B4-BE49-F238E27FC236}">
+                <a16:creationId xmlns:a16="http://schemas.microsoft.com/office/drawing/2014/main" id="{207C2ECF-F2F9-7385-70E3-2330547A5D12}"/>
+              </a:ext>
+            </a:extLst>
+          </p:cNvPr>
+          <p:cNvSpPr/>
+          <p:nvPr/>
+        </p:nvSpPr>
+        <p:spPr>
+          <a:xfrm>
+            <a:off x="1820336" y="4767225"/>
+            <a:ext cx="499532" cy="457200"/>
+          </a:xfrm>
+          <a:prstGeom prst="rect">
+            <a:avLst/>
+          </a:prstGeom>
+        </p:spPr>
+        <p:style>
+          <a:lnRef idx="3">
+            <a:schemeClr val="lt1"/>
+          </a:lnRef>
+          <a:fillRef idx="1">
+            <a:schemeClr val="accent6"/>
+          </a:fillRef>
+          <a:effectRef idx="1">
+            <a:schemeClr val="accent6"/>
+          </a:effectRef>
+          <a:fontRef idx="minor">
+            <a:schemeClr val="lt1"/>
+          </a:fontRef>
+        </p:style>
+        <p:txBody>
+          <a:bodyPr rtlCol="0" anchor="ctr"/>
+          <a:lstStyle/>
+          <a:p>
+            <a:pPr algn="ctr"/>
+            <a:r>
+              <a:rPr lang="en-US" dirty="0"/>
+              <a:t>%</a:t>
+            </a:r>
+          </a:p>
+        </p:txBody>
+      </p:sp>
     </p:spTree>
     <p:extLst>
       <p:ext uri="{BB962C8B-B14F-4D97-AF65-F5344CB8AC3E}">
-        <p14:creationId xmlns:p14="http://schemas.microsoft.com/office/powerpoint/2010/main" val="1534227211"/>
+        <p14:creationId xmlns:p14="http://schemas.microsoft.com/office/powerpoint/2010/main" val="1892950998"/>
       </p:ext>
     </p:extLst>
   </p:cSld>
@@ -3806,200 +4699,6 @@
 </file>
 
 <file path=ppt/slides/slide3.xml><?xml version="1.0" encoding="utf-8"?>
-<p:sld xmlns:a="http://schemas.openxmlformats.org/drawingml/2006/main" xmlns:r="http://schemas.openxmlformats.org/officeDocument/2006/relationships" xmlns:p="http://schemas.openxmlformats.org/presentationml/2006/main">
-  <p:cSld>
-    <p:spTree>
-      <p:nvGrpSpPr>
-        <p:cNvPr id="1" name="">
-          <a:extLst>
-            <a:ext uri="{FF2B5EF4-FFF2-40B4-BE49-F238E27FC236}">
-              <a16:creationId xmlns:a16="http://schemas.microsoft.com/office/drawing/2014/main" id="{231D7708-E890-39FF-ABFB-9C69F1E0E9F9}"/>
-            </a:ext>
-          </a:extLst>
-        </p:cNvPr>
-        <p:cNvGrpSpPr/>
-        <p:nvPr/>
-      </p:nvGrpSpPr>
-      <p:grpSpPr>
-        <a:xfrm>
-          <a:off x="0" y="0"/>
-          <a:ext cx="0" cy="0"/>
-          <a:chOff x="0" y="0"/>
-          <a:chExt cx="0" cy="0"/>
-        </a:xfrm>
-      </p:grpSpPr>
-      <p:pic>
-        <p:nvPicPr>
-          <p:cNvPr id="6" name="Picture 5">
-            <a:extLst>
-              <a:ext uri="{FF2B5EF4-FFF2-40B4-BE49-F238E27FC236}">
-                <a16:creationId xmlns:a16="http://schemas.microsoft.com/office/drawing/2014/main" id="{4A9F6092-9C1C-26A4-756D-A5101B40EF8D}"/>
-              </a:ext>
-            </a:extLst>
-          </p:cNvPr>
-          <p:cNvPicPr>
-            <a:picLocks noChangeAspect="1"/>
-          </p:cNvPicPr>
-          <p:nvPr/>
-        </p:nvPicPr>
-        <p:blipFill>
-          <a:blip r:embed="rId2" cstate="print">
-            <a:extLst>
-              <a:ext uri="{28A0092B-C50C-407E-A947-70E740481C1C}">
-                <a14:useLocalDpi xmlns:a14="http://schemas.microsoft.com/office/drawing/2010/main" val="0"/>
-              </a:ext>
-            </a:extLst>
-          </a:blip>
-          <a:stretch>
-            <a:fillRect/>
-          </a:stretch>
-        </p:blipFill>
-        <p:spPr>
-          <a:xfrm>
-            <a:off x="-117663" y="-89806"/>
-            <a:ext cx="12277005" cy="1420585"/>
-          </a:xfrm>
-          <a:prstGeom prst="rect">
-            <a:avLst/>
-          </a:prstGeom>
-        </p:spPr>
-      </p:pic>
-      <p:sp>
-        <p:nvSpPr>
-          <p:cNvPr id="2" name="TextBox 1">
-            <a:extLst>
-              <a:ext uri="{FF2B5EF4-FFF2-40B4-BE49-F238E27FC236}">
-                <a16:creationId xmlns:a16="http://schemas.microsoft.com/office/drawing/2014/main" id="{5B17446B-D09F-EDE8-A662-E9D0BDA25501}"/>
-              </a:ext>
-            </a:extLst>
-          </p:cNvPr>
-          <p:cNvSpPr txBox="1"/>
-          <p:nvPr/>
-        </p:nvSpPr>
-        <p:spPr>
-          <a:xfrm>
-            <a:off x="499933" y="1406106"/>
-            <a:ext cx="5520906" cy="707886"/>
-          </a:xfrm>
-          <a:prstGeom prst="rect">
-            <a:avLst/>
-          </a:prstGeom>
-          <a:solidFill>
-            <a:srgbClr val="EF9C66"/>
-          </a:solidFill>
-        </p:spPr>
-        <p:txBody>
-          <a:bodyPr wrap="square" rtlCol="0">
-            <a:spAutoFit/>
-          </a:bodyPr>
-          <a:lstStyle/>
-          <a:p>
-            <a:r>
-              <a:rPr lang="en-US" sz="4000"/>
-              <a:t>1. Introduction</a:t>
-            </a:r>
-          </a:p>
-        </p:txBody>
-      </p:sp>
-      <p:sp>
-        <p:nvSpPr>
-          <p:cNvPr id="3" name="TextBox 2">
-            <a:extLst>
-              <a:ext uri="{FF2B5EF4-FFF2-40B4-BE49-F238E27FC236}">
-                <a16:creationId xmlns:a16="http://schemas.microsoft.com/office/drawing/2014/main" id="{46826289-8DD5-D551-A296-8C95182EDCE4}"/>
-              </a:ext>
-            </a:extLst>
-          </p:cNvPr>
-          <p:cNvSpPr txBox="1"/>
-          <p:nvPr/>
-        </p:nvSpPr>
-        <p:spPr>
-          <a:xfrm>
-            <a:off x="499932" y="2305050"/>
-            <a:ext cx="9060527" cy="4031873"/>
-          </a:xfrm>
-          <a:prstGeom prst="rect">
-            <a:avLst/>
-          </a:prstGeom>
-          <a:solidFill>
-            <a:srgbClr val="C8CFA0"/>
-          </a:solidFill>
-        </p:spPr>
-        <p:txBody>
-          <a:bodyPr wrap="square" rtlCol="0">
-            <a:spAutoFit/>
-          </a:bodyPr>
-          <a:lstStyle/>
-          <a:p>
-            <a:pPr marL="285750" indent="-285750">
-              <a:buFont typeface="Arial" panose="020B0604020202020204" pitchFamily="34" charset="0"/>
-              <a:buChar char="•"/>
-            </a:pPr>
-            <a:r>
-              <a:rPr lang="en-US" sz="3200"/>
-              <a:t>How to get input: scanf</a:t>
-            </a:r>
-          </a:p>
-          <a:p>
-            <a:pPr marL="285750" indent="-285750">
-              <a:buFont typeface="Arial" panose="020B0604020202020204" pitchFamily="34" charset="0"/>
-              <a:buChar char="•"/>
-            </a:pPr>
-            <a:r>
-              <a:rPr lang="en-US" sz="3200"/>
-              <a:t>How to print to console: printf</a:t>
-            </a:r>
-          </a:p>
-          <a:p>
-            <a:pPr marL="285750" indent="-285750">
-              <a:buFont typeface="Arial" panose="020B0604020202020204" pitchFamily="34" charset="0"/>
-              <a:buChar char="•"/>
-            </a:pPr>
-            <a:endParaRPr lang="en-US" sz="3200"/>
-          </a:p>
-          <a:p>
-            <a:endParaRPr lang="en-US" sz="3200"/>
-          </a:p>
-          <a:p>
-            <a:pPr marL="285750" indent="-285750">
-              <a:buFont typeface="Arial" panose="020B0604020202020204" pitchFamily="34" charset="0"/>
-              <a:buChar char="•"/>
-            </a:pPr>
-            <a:endParaRPr lang="en-US" sz="3200"/>
-          </a:p>
-          <a:p>
-            <a:pPr marL="285750" indent="-285750">
-              <a:buFont typeface="Arial" panose="020B0604020202020204" pitchFamily="34" charset="0"/>
-              <a:buChar char="•"/>
-            </a:pPr>
-            <a:endParaRPr lang="en-US" sz="3200"/>
-          </a:p>
-          <a:p>
-            <a:pPr marL="285750" indent="-285750">
-              <a:buFont typeface="Arial" panose="020B0604020202020204" pitchFamily="34" charset="0"/>
-              <a:buChar char="•"/>
-            </a:pPr>
-            <a:endParaRPr lang="en-US" sz="3200"/>
-          </a:p>
-          <a:p>
-            <a:endParaRPr lang="en-US" sz="3200"/>
-          </a:p>
-        </p:txBody>
-      </p:sp>
-    </p:spTree>
-    <p:extLst>
-      <p:ext uri="{BB962C8B-B14F-4D97-AF65-F5344CB8AC3E}">
-        <p14:creationId xmlns:p14="http://schemas.microsoft.com/office/powerpoint/2010/main" val="3610183221"/>
-      </p:ext>
-    </p:extLst>
-  </p:cSld>
-  <p:clrMapOvr>
-    <a:masterClrMapping/>
-  </p:clrMapOvr>
-</p:sld>
-</file>
-
-<file path=ppt/slides/slide4.xml><?xml version="1.0" encoding="utf-8"?>
 <p:sld xmlns:a="http://schemas.openxmlformats.org/drawingml/2006/main" xmlns:r="http://schemas.openxmlformats.org/officeDocument/2006/relationships" xmlns:p="http://schemas.openxmlformats.org/presentationml/2006/main">
   <p:cSld>
     <p:spTree>
@@ -4078,7 +4777,7 @@
           <a:p>
             <a:r>
               <a:rPr lang="en-US" sz="4000"/>
-              <a:t>2. Basic data type</a:t>
+              <a:t>1. Introduction</a:t>
             </a:r>
           </a:p>
         </p:txBody>
@@ -4097,7 +4796,7 @@
         </p:nvSpPr>
         <p:spPr>
           <a:xfrm>
-            <a:off x="499932" y="2305050"/>
+            <a:off x="1331782" y="2444750"/>
             <a:ext cx="10938693" cy="3539430"/>
           </a:xfrm>
           <a:prstGeom prst="rect">
@@ -4119,27 +4818,7 @@
             </a:pPr>
             <a:r>
               <a:rPr lang="en-US" sz="3200"/>
-              <a:t>Build-in</a:t>
-            </a:r>
-          </a:p>
-          <a:p>
-            <a:pPr marL="742950" lvl="1" indent="-285750">
-              <a:buFont typeface="Arial" panose="020B0604020202020204" pitchFamily="34" charset="0"/>
-              <a:buChar char="•"/>
-            </a:pPr>
-            <a:r>
-              <a:rPr lang="en-US" sz="3200"/>
-              <a:t>Basic</a:t>
-            </a:r>
-          </a:p>
-          <a:p>
-            <a:pPr marL="742950" lvl="1" indent="-285750">
-              <a:buFont typeface="Arial" panose="020B0604020202020204" pitchFamily="34" charset="0"/>
-              <a:buChar char="•"/>
-            </a:pPr>
-            <a:r>
-              <a:rPr lang="en-US" sz="3200"/>
-              <a:t>Modifier</a:t>
+              <a:t>Syntax</a:t>
             </a:r>
           </a:p>
           <a:p>
@@ -4147,47 +4826,295 @@
               <a:buFont typeface="Arial" panose="020B0604020202020204" pitchFamily="34" charset="0"/>
               <a:buChar char="•"/>
             </a:pPr>
-            <a:r>
-              <a:rPr lang="en-US" sz="3200"/>
-              <a:t>User-defined</a:t>
-            </a:r>
-          </a:p>
-          <a:p>
-            <a:pPr marL="742950" lvl="1" indent="-285750">
+            <a:endParaRPr lang="en-US" sz="3200"/>
+          </a:p>
+          <a:p>
+            <a:endParaRPr lang="en-US" sz="3200"/>
+          </a:p>
+          <a:p>
+            <a:pPr marL="285750" indent="-285750">
               <a:buFont typeface="Arial" panose="020B0604020202020204" pitchFamily="34" charset="0"/>
               <a:buChar char="•"/>
             </a:pPr>
-            <a:r>
-              <a:rPr lang="en-US" sz="3200"/>
-              <a:t>Structure</a:t>
-            </a:r>
-          </a:p>
-          <a:p>
-            <a:pPr marL="742950" lvl="1" indent="-285750">
+            <a:endParaRPr lang="en-US" sz="3200"/>
+          </a:p>
+          <a:p>
+            <a:pPr marL="285750" indent="-285750">
               <a:buFont typeface="Arial" panose="020B0604020202020204" pitchFamily="34" charset="0"/>
               <a:buChar char="•"/>
             </a:pPr>
-            <a:r>
-              <a:rPr lang="en-US" sz="3200"/>
-              <a:t>Enum</a:t>
-            </a:r>
-          </a:p>
-          <a:p>
-            <a:pPr marL="742950" lvl="1" indent="-285750">
+            <a:endParaRPr lang="en-US" sz="3200"/>
+          </a:p>
+          <a:p>
+            <a:pPr marL="285750" indent="-285750">
               <a:buFont typeface="Arial" panose="020B0604020202020204" pitchFamily="34" charset="0"/>
               <a:buChar char="•"/>
             </a:pPr>
-            <a:r>
-              <a:rPr lang="en-US" sz="3200"/>
-              <a:t>Union </a:t>
-            </a:r>
-          </a:p>
-        </p:txBody>
-      </p:sp>
+            <a:endParaRPr lang="en-US" sz="3200"/>
+          </a:p>
+          <a:p>
+            <a:endParaRPr lang="en-US" sz="3200"/>
+          </a:p>
+        </p:txBody>
+      </p:sp>
+      <p:pic>
+        <p:nvPicPr>
+          <p:cNvPr id="5" name="Picture 4">
+            <a:extLst>
+              <a:ext uri="{FF2B5EF4-FFF2-40B4-BE49-F238E27FC236}">
+                <a16:creationId xmlns:a16="http://schemas.microsoft.com/office/drawing/2014/main" id="{71881EBF-197E-D1E0-2EC0-3B6562725A59}"/>
+              </a:ext>
+            </a:extLst>
+          </p:cNvPr>
+          <p:cNvPicPr>
+            <a:picLocks noChangeAspect="1"/>
+          </p:cNvPicPr>
+          <p:nvPr/>
+        </p:nvPicPr>
+        <p:blipFill>
+          <a:blip r:embed="rId3"/>
+          <a:stretch>
+            <a:fillRect/>
+          </a:stretch>
+        </p:blipFill>
+        <p:spPr>
+          <a:xfrm>
+            <a:off x="4675442" y="2815629"/>
+            <a:ext cx="6246209" cy="2939659"/>
+          </a:xfrm>
+          <a:prstGeom prst="rect">
+            <a:avLst/>
+          </a:prstGeom>
+        </p:spPr>
+      </p:pic>
+      <p:pic>
+        <p:nvPicPr>
+          <p:cNvPr id="8" name="Picture 7">
+            <a:extLst>
+              <a:ext uri="{FF2B5EF4-FFF2-40B4-BE49-F238E27FC236}">
+                <a16:creationId xmlns:a16="http://schemas.microsoft.com/office/drawing/2014/main" id="{03181CFF-9895-56DC-2253-CB59D5D28464}"/>
+              </a:ext>
+            </a:extLst>
+          </p:cNvPr>
+          <p:cNvPicPr>
+            <a:picLocks noChangeAspect="1"/>
+          </p:cNvPicPr>
+          <p:nvPr/>
+        </p:nvPicPr>
+        <p:blipFill>
+          <a:blip r:embed="rId4"/>
+          <a:stretch>
+            <a:fillRect/>
+          </a:stretch>
+        </p:blipFill>
+        <p:spPr>
+          <a:xfrm>
+            <a:off x="1139636" y="3429000"/>
+            <a:ext cx="3181794" cy="2191056"/>
+          </a:xfrm>
+          <a:prstGeom prst="rect">
+            <a:avLst/>
+          </a:prstGeom>
+        </p:spPr>
+      </p:pic>
     </p:spTree>
     <p:extLst>
       <p:ext uri="{BB962C8B-B14F-4D97-AF65-F5344CB8AC3E}">
-        <p14:creationId xmlns:p14="http://schemas.microsoft.com/office/powerpoint/2010/main" val="378553985"/>
+        <p14:creationId xmlns:p14="http://schemas.microsoft.com/office/powerpoint/2010/main" val="1534227211"/>
+      </p:ext>
+    </p:extLst>
+  </p:cSld>
+  <p:clrMapOvr>
+    <a:masterClrMapping/>
+  </p:clrMapOvr>
+</p:sld>
+</file>
+
+<file path=ppt/slides/slide4.xml><?xml version="1.0" encoding="utf-8"?>
+<p:sld xmlns:a="http://schemas.openxmlformats.org/drawingml/2006/main" xmlns:r="http://schemas.openxmlformats.org/officeDocument/2006/relationships" xmlns:p="http://schemas.openxmlformats.org/presentationml/2006/main">
+  <p:cSld>
+    <p:spTree>
+      <p:nvGrpSpPr>
+        <p:cNvPr id="1" name="">
+          <a:extLst>
+            <a:ext uri="{FF2B5EF4-FFF2-40B4-BE49-F238E27FC236}">
+              <a16:creationId xmlns:a16="http://schemas.microsoft.com/office/drawing/2014/main" id="{231D7708-E890-39FF-ABFB-9C69F1E0E9F9}"/>
+            </a:ext>
+          </a:extLst>
+        </p:cNvPr>
+        <p:cNvGrpSpPr/>
+        <p:nvPr/>
+      </p:nvGrpSpPr>
+      <p:grpSpPr>
+        <a:xfrm>
+          <a:off x="0" y="0"/>
+          <a:ext cx="0" cy="0"/>
+          <a:chOff x="0" y="0"/>
+          <a:chExt cx="0" cy="0"/>
+        </a:xfrm>
+      </p:grpSpPr>
+      <p:pic>
+        <p:nvPicPr>
+          <p:cNvPr id="6" name="Picture 5">
+            <a:extLst>
+              <a:ext uri="{FF2B5EF4-FFF2-40B4-BE49-F238E27FC236}">
+                <a16:creationId xmlns:a16="http://schemas.microsoft.com/office/drawing/2014/main" id="{4A9F6092-9C1C-26A4-756D-A5101B40EF8D}"/>
+              </a:ext>
+            </a:extLst>
+          </p:cNvPr>
+          <p:cNvPicPr>
+            <a:picLocks noChangeAspect="1"/>
+          </p:cNvPicPr>
+          <p:nvPr/>
+        </p:nvPicPr>
+        <p:blipFill>
+          <a:blip r:embed="rId2" cstate="print">
+            <a:extLst>
+              <a:ext uri="{28A0092B-C50C-407E-A947-70E740481C1C}">
+                <a14:useLocalDpi xmlns:a14="http://schemas.microsoft.com/office/drawing/2010/main" val="0"/>
+              </a:ext>
+            </a:extLst>
+          </a:blip>
+          <a:stretch>
+            <a:fillRect/>
+          </a:stretch>
+        </p:blipFill>
+        <p:spPr>
+          <a:xfrm>
+            <a:off x="-117663" y="-89806"/>
+            <a:ext cx="12277005" cy="1420585"/>
+          </a:xfrm>
+          <a:prstGeom prst="rect">
+            <a:avLst/>
+          </a:prstGeom>
+        </p:spPr>
+      </p:pic>
+      <p:sp>
+        <p:nvSpPr>
+          <p:cNvPr id="2" name="TextBox 1">
+            <a:extLst>
+              <a:ext uri="{FF2B5EF4-FFF2-40B4-BE49-F238E27FC236}">
+                <a16:creationId xmlns:a16="http://schemas.microsoft.com/office/drawing/2014/main" id="{5B17446B-D09F-EDE8-A662-E9D0BDA25501}"/>
+              </a:ext>
+            </a:extLst>
+          </p:cNvPr>
+          <p:cNvSpPr txBox="1"/>
+          <p:nvPr/>
+        </p:nvSpPr>
+        <p:spPr>
+          <a:xfrm>
+            <a:off x="499933" y="1406106"/>
+            <a:ext cx="5520906" cy="707886"/>
+          </a:xfrm>
+          <a:prstGeom prst="rect">
+            <a:avLst/>
+          </a:prstGeom>
+          <a:solidFill>
+            <a:srgbClr val="EF9C66"/>
+          </a:solidFill>
+        </p:spPr>
+        <p:txBody>
+          <a:bodyPr wrap="square" rtlCol="0">
+            <a:spAutoFit/>
+          </a:bodyPr>
+          <a:lstStyle/>
+          <a:p>
+            <a:r>
+              <a:rPr lang="en-US" sz="4000"/>
+              <a:t>1. Introduction</a:t>
+            </a:r>
+          </a:p>
+        </p:txBody>
+      </p:sp>
+      <p:sp>
+        <p:nvSpPr>
+          <p:cNvPr id="3" name="TextBox 2">
+            <a:extLst>
+              <a:ext uri="{FF2B5EF4-FFF2-40B4-BE49-F238E27FC236}">
+                <a16:creationId xmlns:a16="http://schemas.microsoft.com/office/drawing/2014/main" id="{46826289-8DD5-D551-A296-8C95182EDCE4}"/>
+              </a:ext>
+            </a:extLst>
+          </p:cNvPr>
+          <p:cNvSpPr txBox="1"/>
+          <p:nvPr/>
+        </p:nvSpPr>
+        <p:spPr>
+          <a:xfrm>
+            <a:off x="499932" y="2305050"/>
+            <a:ext cx="9060527" cy="4031873"/>
+          </a:xfrm>
+          <a:prstGeom prst="rect">
+            <a:avLst/>
+          </a:prstGeom>
+          <a:solidFill>
+            <a:srgbClr val="C8CFA0"/>
+          </a:solidFill>
+        </p:spPr>
+        <p:txBody>
+          <a:bodyPr wrap="square" rtlCol="0">
+            <a:spAutoFit/>
+          </a:bodyPr>
+          <a:lstStyle/>
+          <a:p>
+            <a:pPr marL="285750" indent="-285750">
+              <a:buFont typeface="Arial" panose="020B0604020202020204" pitchFamily="34" charset="0"/>
+              <a:buChar char="•"/>
+            </a:pPr>
+            <a:r>
+              <a:rPr lang="en-US" sz="3200"/>
+              <a:t>How to get input: scanf</a:t>
+            </a:r>
+          </a:p>
+          <a:p>
+            <a:pPr marL="285750" indent="-285750">
+              <a:buFont typeface="Arial" panose="020B0604020202020204" pitchFamily="34" charset="0"/>
+              <a:buChar char="•"/>
+            </a:pPr>
+            <a:r>
+              <a:rPr lang="en-US" sz="3200"/>
+              <a:t>How to print to console: printf</a:t>
+            </a:r>
+          </a:p>
+          <a:p>
+            <a:pPr marL="285750" indent="-285750">
+              <a:buFont typeface="Arial" panose="020B0604020202020204" pitchFamily="34" charset="0"/>
+              <a:buChar char="•"/>
+            </a:pPr>
+            <a:endParaRPr lang="en-US" sz="3200"/>
+          </a:p>
+          <a:p>
+            <a:endParaRPr lang="en-US" sz="3200"/>
+          </a:p>
+          <a:p>
+            <a:pPr marL="285750" indent="-285750">
+              <a:buFont typeface="Arial" panose="020B0604020202020204" pitchFamily="34" charset="0"/>
+              <a:buChar char="•"/>
+            </a:pPr>
+            <a:endParaRPr lang="en-US" sz="3200"/>
+          </a:p>
+          <a:p>
+            <a:pPr marL="285750" indent="-285750">
+              <a:buFont typeface="Arial" panose="020B0604020202020204" pitchFamily="34" charset="0"/>
+              <a:buChar char="•"/>
+            </a:pPr>
+            <a:endParaRPr lang="en-US" sz="3200"/>
+          </a:p>
+          <a:p>
+            <a:pPr marL="285750" indent="-285750">
+              <a:buFont typeface="Arial" panose="020B0604020202020204" pitchFamily="34" charset="0"/>
+              <a:buChar char="•"/>
+            </a:pPr>
+            <a:endParaRPr lang="en-US" sz="3200"/>
+          </a:p>
+          <a:p>
+            <a:endParaRPr lang="en-US" sz="3200"/>
+          </a:p>
+        </p:txBody>
+      </p:sp>
+    </p:spTree>
+    <p:extLst>
+      <p:ext uri="{BB962C8B-B14F-4D97-AF65-F5344CB8AC3E}">
+        <p14:creationId xmlns:p14="http://schemas.microsoft.com/office/powerpoint/2010/main" val="3610183221"/>
       </p:ext>
     </p:extLst>
   </p:cSld>
@@ -4281,40 +5208,111 @@
           </a:p>
         </p:txBody>
       </p:sp>
-      <p:pic>
-        <p:nvPicPr>
-          <p:cNvPr id="5" name="Picture 4">
+      <p:sp>
+        <p:nvSpPr>
+          <p:cNvPr id="3" name="TextBox 2">
             <a:extLst>
               <a:ext uri="{FF2B5EF4-FFF2-40B4-BE49-F238E27FC236}">
-                <a16:creationId xmlns:a16="http://schemas.microsoft.com/office/drawing/2014/main" id="{AC9FCB31-71BB-2152-F104-3D13E795A092}"/>
+                <a16:creationId xmlns:a16="http://schemas.microsoft.com/office/drawing/2014/main" id="{DCD3C42D-36A3-F27E-0EA8-23CB65CCC6BB}"/>
               </a:ext>
             </a:extLst>
           </p:cNvPr>
-          <p:cNvPicPr>
-            <a:picLocks noChangeAspect="1"/>
-          </p:cNvPicPr>
+          <p:cNvSpPr txBox="1"/>
           <p:nvPr/>
-        </p:nvPicPr>
-        <p:blipFill>
-          <a:blip r:embed="rId3"/>
-          <a:stretch>
-            <a:fillRect/>
-          </a:stretch>
-        </p:blipFill>
-        <p:spPr>
-          <a:xfrm>
-            <a:off x="1434439" y="2663318"/>
-            <a:ext cx="7502527" cy="3495062"/>
+        </p:nvSpPr>
+        <p:spPr>
+          <a:xfrm>
+            <a:off x="499932" y="2305050"/>
+            <a:ext cx="10938693" cy="3539430"/>
           </a:xfrm>
           <a:prstGeom prst="rect">
             <a:avLst/>
           </a:prstGeom>
-        </p:spPr>
-      </p:pic>
+          <a:solidFill>
+            <a:srgbClr val="C8CFA0"/>
+          </a:solidFill>
+        </p:spPr>
+        <p:txBody>
+          <a:bodyPr wrap="square" rtlCol="0">
+            <a:spAutoFit/>
+          </a:bodyPr>
+          <a:lstStyle/>
+          <a:p>
+            <a:pPr marL="285750" indent="-285750">
+              <a:buFont typeface="Arial" panose="020B0604020202020204" pitchFamily="34" charset="0"/>
+              <a:buChar char="•"/>
+            </a:pPr>
+            <a:r>
+              <a:rPr lang="en-US" sz="3200"/>
+              <a:t>Build-in</a:t>
+            </a:r>
+          </a:p>
+          <a:p>
+            <a:pPr marL="742950" lvl="1" indent="-285750">
+              <a:buFont typeface="Arial" panose="020B0604020202020204" pitchFamily="34" charset="0"/>
+              <a:buChar char="•"/>
+            </a:pPr>
+            <a:r>
+              <a:rPr lang="en-US" sz="3200"/>
+              <a:t>Basic</a:t>
+            </a:r>
+          </a:p>
+          <a:p>
+            <a:pPr marL="742950" lvl="1" indent="-285750">
+              <a:buFont typeface="Arial" panose="020B0604020202020204" pitchFamily="34" charset="0"/>
+              <a:buChar char="•"/>
+            </a:pPr>
+            <a:r>
+              <a:rPr lang="en-US" sz="3200"/>
+              <a:t>Modifier</a:t>
+            </a:r>
+          </a:p>
+          <a:p>
+            <a:pPr marL="285750" indent="-285750">
+              <a:buFont typeface="Arial" panose="020B0604020202020204" pitchFamily="34" charset="0"/>
+              <a:buChar char="•"/>
+            </a:pPr>
+            <a:r>
+              <a:rPr lang="en-US" sz="3200"/>
+              <a:t>User-defined</a:t>
+            </a:r>
+          </a:p>
+          <a:p>
+            <a:pPr marL="742950" lvl="1" indent="-285750">
+              <a:buFont typeface="Arial" panose="020B0604020202020204" pitchFamily="34" charset="0"/>
+              <a:buChar char="•"/>
+            </a:pPr>
+            <a:r>
+              <a:rPr lang="en-US" sz="3200"/>
+              <a:t>Structure</a:t>
+            </a:r>
+          </a:p>
+          <a:p>
+            <a:pPr marL="742950" lvl="1" indent="-285750">
+              <a:buFont typeface="Arial" panose="020B0604020202020204" pitchFamily="34" charset="0"/>
+              <a:buChar char="•"/>
+            </a:pPr>
+            <a:r>
+              <a:rPr lang="en-US" sz="3200"/>
+              <a:t>Enum</a:t>
+            </a:r>
+          </a:p>
+          <a:p>
+            <a:pPr marL="742950" lvl="1" indent="-285750">
+              <a:buFont typeface="Arial" panose="020B0604020202020204" pitchFamily="34" charset="0"/>
+              <a:buChar char="•"/>
+            </a:pPr>
+            <a:r>
+              <a:rPr lang="en-US" sz="3200"/>
+              <a:t>Union </a:t>
+            </a:r>
+          </a:p>
+        </p:txBody>
+      </p:sp>
     </p:spTree>
     <p:extLst>
       <p:ext uri="{BB962C8B-B14F-4D97-AF65-F5344CB8AC3E}">
-        <p14:creationId xmlns:p14="http://schemas.microsoft.com/office/powerpoint/2010/main" val="2511709452"/>
+        <p14:creationId xmlns:p14="http://schemas.microsoft.com/office/powerpoint/2010/main" val="378553985"/>
       </p:ext>
     </p:extLst>
   </p:cSld>
@@ -4410,10 +5408,10 @@
       </p:sp>
       <p:pic>
         <p:nvPicPr>
-          <p:cNvPr id="4" name="Picture 3">
+          <p:cNvPr id="5" name="Picture 4">
             <a:extLst>
               <a:ext uri="{FF2B5EF4-FFF2-40B4-BE49-F238E27FC236}">
-                <a16:creationId xmlns:a16="http://schemas.microsoft.com/office/drawing/2014/main" id="{4E65E751-AFF8-78FC-03D4-E42FC8A44969}"/>
+                <a16:creationId xmlns:a16="http://schemas.microsoft.com/office/drawing/2014/main" id="{AC9FCB31-71BB-2152-F104-3D13E795A092}"/>
               </a:ext>
             </a:extLst>
           </p:cNvPr>
@@ -4430,8 +5428,8 @@
         </p:blipFill>
         <p:spPr>
           <a:xfrm>
-            <a:off x="1717334" y="2425908"/>
-            <a:ext cx="8326012" cy="3886742"/>
+            <a:off x="1434439" y="2663318"/>
+            <a:ext cx="7502527" cy="3495062"/>
           </a:xfrm>
           <a:prstGeom prst="rect">
             <a:avLst/>
@@ -4441,7 +5439,7 @@
     </p:spTree>
     <p:extLst>
       <p:ext uri="{BB962C8B-B14F-4D97-AF65-F5344CB8AC3E}">
-        <p14:creationId xmlns:p14="http://schemas.microsoft.com/office/powerpoint/2010/main" val="2652719436"/>
+        <p14:creationId xmlns:p14="http://schemas.microsoft.com/office/powerpoint/2010/main" val="2511709452"/>
       </p:ext>
     </p:extLst>
   </p:cSld>
@@ -4459,7 +5457,7 @@
         <p:cNvPr id="1" name="">
           <a:extLst>
             <a:ext uri="{FF2B5EF4-FFF2-40B4-BE49-F238E27FC236}">
-              <a16:creationId xmlns:a16="http://schemas.microsoft.com/office/drawing/2014/main" id="{6ABDB481-96B5-6404-B787-C6A2564963D4}"/>
+              <a16:creationId xmlns:a16="http://schemas.microsoft.com/office/drawing/2014/main" id="{39BEBB25-D631-79FC-75BC-2EA418F8C334}"/>
             </a:ext>
           </a:extLst>
         </p:cNvPr>
@@ -4479,7 +5477,7 @@
           <p:cNvPr id="6" name="Picture 5">
             <a:extLst>
               <a:ext uri="{FF2B5EF4-FFF2-40B4-BE49-F238E27FC236}">
-                <a16:creationId xmlns:a16="http://schemas.microsoft.com/office/drawing/2014/main" id="{7D14AE27-82B7-DE09-7679-AA859051CBF5}"/>
+                <a16:creationId xmlns:a16="http://schemas.microsoft.com/office/drawing/2014/main" id="{4E29EA15-E184-F176-3994-95EC2AD798B6}"/>
               </a:ext>
             </a:extLst>
           </p:cNvPr>
@@ -4515,7 +5513,7 @@
           <p:cNvPr id="2" name="TextBox 1">
             <a:extLst>
               <a:ext uri="{FF2B5EF4-FFF2-40B4-BE49-F238E27FC236}">
-                <a16:creationId xmlns:a16="http://schemas.microsoft.com/office/drawing/2014/main" id="{8F17AB57-0EA7-F127-CB22-2DC396F915A7}"/>
+                <a16:creationId xmlns:a16="http://schemas.microsoft.com/office/drawing/2014/main" id="{DBA68BE6-2AFC-9239-A44E-1A2FA20C98E4}"/>
               </a:ext>
             </a:extLst>
           </p:cNvPr>
@@ -4549,89 +5547,295 @@
       </p:sp>
       <p:sp>
         <p:nvSpPr>
-          <p:cNvPr id="3" name="TextBox 2">
+          <p:cNvPr id="3" name="Rectangle 2">
             <a:extLst>
               <a:ext uri="{FF2B5EF4-FFF2-40B4-BE49-F238E27FC236}">
-                <a16:creationId xmlns:a16="http://schemas.microsoft.com/office/drawing/2014/main" id="{1487B23E-C6DA-396A-F85F-D097F9B925A3}"/>
+                <a16:creationId xmlns:a16="http://schemas.microsoft.com/office/drawing/2014/main" id="{1120A891-1388-DAA4-B04C-3FE63C187757}"/>
               </a:ext>
             </a:extLst>
           </p:cNvPr>
-          <p:cNvSpPr txBox="1"/>
+          <p:cNvSpPr/>
           <p:nvPr/>
         </p:nvSpPr>
         <p:spPr>
           <a:xfrm>
-            <a:off x="499932" y="2305050"/>
-            <a:ext cx="10938693" cy="2554545"/>
+            <a:off x="1046480" y="3352800"/>
+            <a:ext cx="1584960" cy="985520"/>
           </a:xfrm>
           <a:prstGeom prst="rect">
             <a:avLst/>
           </a:prstGeom>
-          <a:solidFill>
-            <a:srgbClr val="C8CFA0"/>
-          </a:solidFill>
-        </p:spPr>
-        <p:txBody>
-          <a:bodyPr wrap="square" rtlCol="0">
-            <a:spAutoFit/>
-          </a:bodyPr>
-          <a:lstStyle/>
-          <a:p>
-            <a:pPr marL="285750" indent="-285750">
-              <a:buFont typeface="Arial" panose="020B0604020202020204" pitchFamily="34" charset="0"/>
-              <a:buChar char="•"/>
-            </a:pPr>
-            <a:r>
-              <a:rPr lang="en-US" sz="3200"/>
-              <a:t>Exercise: input these variables and </a:t>
-            </a:r>
-          </a:p>
-          <a:p>
-            <a:pPr marL="742950" lvl="1" indent="-285750">
-              <a:buFont typeface="Arial" panose="020B0604020202020204" pitchFamily="34" charset="0"/>
-              <a:buChar char="•"/>
-            </a:pPr>
-            <a:r>
-              <a:rPr lang="en-US" sz="3200"/>
-              <a:t>Int</a:t>
-            </a:r>
-          </a:p>
-          <a:p>
-            <a:pPr marL="742950" lvl="1" indent="-285750">
-              <a:buFont typeface="Arial" panose="020B0604020202020204" pitchFamily="34" charset="0"/>
-              <a:buChar char="•"/>
-            </a:pPr>
-            <a:r>
-              <a:rPr lang="en-US" sz="3200"/>
-              <a:t>Float</a:t>
-            </a:r>
-          </a:p>
-          <a:p>
-            <a:pPr marL="742950" lvl="1" indent="-285750">
-              <a:buFont typeface="Arial" panose="020B0604020202020204" pitchFamily="34" charset="0"/>
-              <a:buChar char="•"/>
-            </a:pPr>
-            <a:r>
-              <a:rPr lang="en-US" sz="3200"/>
-              <a:t>Char</a:t>
-            </a:r>
-          </a:p>
-          <a:p>
-            <a:pPr marL="285750" indent="-285750">
-              <a:buFont typeface="Arial" panose="020B0604020202020204" pitchFamily="34" charset="0"/>
-              <a:buChar char="•"/>
-            </a:pPr>
-            <a:r>
-              <a:rPr lang="en-US" sz="3200"/>
-              <a:t>Exercise: print sizeof each data-type</a:t>
-            </a:r>
+        </p:spPr>
+        <p:style>
+          <a:lnRef idx="3">
+            <a:schemeClr val="lt1"/>
+          </a:lnRef>
+          <a:fillRef idx="1">
+            <a:schemeClr val="accent4"/>
+          </a:fillRef>
+          <a:effectRef idx="1">
+            <a:schemeClr val="accent4"/>
+          </a:effectRef>
+          <a:fontRef idx="minor">
+            <a:schemeClr val="lt1"/>
+          </a:fontRef>
+        </p:style>
+        <p:txBody>
+          <a:bodyPr rtlCol="0" anchor="ctr"/>
+          <a:lstStyle/>
+          <a:p>
+            <a:pPr algn="ctr"/>
+            <a:r>
+              <a:rPr lang="en-US" dirty="0"/>
+              <a:t>CPU</a:t>
+            </a:r>
+          </a:p>
+        </p:txBody>
+      </p:sp>
+      <p:sp>
+        <p:nvSpPr>
+          <p:cNvPr id="4" name="Rectangle 3">
+            <a:extLst>
+              <a:ext uri="{FF2B5EF4-FFF2-40B4-BE49-F238E27FC236}">
+                <a16:creationId xmlns:a16="http://schemas.microsoft.com/office/drawing/2014/main" id="{EBDE9269-B125-B88D-5BDF-B831D0AAD5BA}"/>
+              </a:ext>
+            </a:extLst>
+          </p:cNvPr>
+          <p:cNvSpPr/>
+          <p:nvPr/>
+        </p:nvSpPr>
+        <p:spPr>
+          <a:xfrm>
+            <a:off x="3561080" y="2467309"/>
+            <a:ext cx="1584960" cy="985520"/>
+          </a:xfrm>
+          <a:prstGeom prst="rect">
+            <a:avLst/>
+          </a:prstGeom>
+        </p:spPr>
+        <p:style>
+          <a:lnRef idx="3">
+            <a:schemeClr val="lt1"/>
+          </a:lnRef>
+          <a:fillRef idx="1">
+            <a:schemeClr val="accent6"/>
+          </a:fillRef>
+          <a:effectRef idx="1">
+            <a:schemeClr val="accent6"/>
+          </a:effectRef>
+          <a:fontRef idx="minor">
+            <a:schemeClr val="lt1"/>
+          </a:fontRef>
+        </p:style>
+        <p:txBody>
+          <a:bodyPr rtlCol="0" anchor="ctr"/>
+          <a:lstStyle/>
+          <a:p>
+            <a:pPr algn="ctr"/>
+            <a:r>
+              <a:rPr lang="en-US" dirty="0"/>
+              <a:t>RAM</a:t>
+            </a:r>
+          </a:p>
+        </p:txBody>
+      </p:sp>
+      <p:sp>
+        <p:nvSpPr>
+          <p:cNvPr id="7" name="Rectangle 6">
+            <a:extLst>
+              <a:ext uri="{FF2B5EF4-FFF2-40B4-BE49-F238E27FC236}">
+                <a16:creationId xmlns:a16="http://schemas.microsoft.com/office/drawing/2014/main" id="{2489345C-7F69-E1F0-21B0-1C054C63B80C}"/>
+              </a:ext>
+            </a:extLst>
+          </p:cNvPr>
+          <p:cNvSpPr/>
+          <p:nvPr/>
+        </p:nvSpPr>
+        <p:spPr>
+          <a:xfrm>
+            <a:off x="3169920" y="3845560"/>
+            <a:ext cx="2926080" cy="2118360"/>
+          </a:xfrm>
+          <a:prstGeom prst="rect">
+            <a:avLst/>
+          </a:prstGeom>
+        </p:spPr>
+        <p:style>
+          <a:lnRef idx="1">
+            <a:schemeClr val="accent2"/>
+          </a:lnRef>
+          <a:fillRef idx="2">
+            <a:schemeClr val="accent2"/>
+          </a:fillRef>
+          <a:effectRef idx="1">
+            <a:schemeClr val="accent2"/>
+          </a:effectRef>
+          <a:fontRef idx="minor">
+            <a:schemeClr val="dk1"/>
+          </a:fontRef>
+        </p:style>
+        <p:txBody>
+          <a:bodyPr rtlCol="0" anchor="ctr"/>
+          <a:lstStyle/>
+          <a:p>
+            <a:pPr algn="ctr"/>
+            <a:r>
+              <a:rPr lang="en-US" dirty="0"/>
+              <a:t>HDD/SSD</a:t>
+            </a:r>
+          </a:p>
+        </p:txBody>
+      </p:sp>
+      <p:sp>
+        <p:nvSpPr>
+          <p:cNvPr id="8" name="Rectangle 7">
+            <a:extLst>
+              <a:ext uri="{FF2B5EF4-FFF2-40B4-BE49-F238E27FC236}">
+                <a16:creationId xmlns:a16="http://schemas.microsoft.com/office/drawing/2014/main" id="{32DE270D-70A4-1D20-9287-F8838DE49642}"/>
+              </a:ext>
+            </a:extLst>
+          </p:cNvPr>
+          <p:cNvSpPr/>
+          <p:nvPr/>
+        </p:nvSpPr>
+        <p:spPr>
+          <a:xfrm>
+            <a:off x="6020839" y="2860040"/>
+            <a:ext cx="1584960" cy="985520"/>
+          </a:xfrm>
+          <a:prstGeom prst="rect">
+            <a:avLst/>
+          </a:prstGeom>
+        </p:spPr>
+        <p:style>
+          <a:lnRef idx="3">
+            <a:schemeClr val="lt1"/>
+          </a:lnRef>
+          <a:fillRef idx="1">
+            <a:schemeClr val="accent5"/>
+          </a:fillRef>
+          <a:effectRef idx="1">
+            <a:schemeClr val="accent5"/>
+          </a:effectRef>
+          <a:fontRef idx="minor">
+            <a:schemeClr val="lt1"/>
+          </a:fontRef>
+        </p:style>
+        <p:txBody>
+          <a:bodyPr rtlCol="0" anchor="ctr"/>
+          <a:lstStyle/>
+          <a:p>
+            <a:pPr algn="ctr"/>
+            <a:r>
+              <a:rPr lang="en-US" dirty="0"/>
+              <a:t>GPU</a:t>
+            </a:r>
+          </a:p>
+        </p:txBody>
+      </p:sp>
+      <p:sp>
+        <p:nvSpPr>
+          <p:cNvPr id="9" name="Rectangle 8">
+            <a:extLst>
+              <a:ext uri="{FF2B5EF4-FFF2-40B4-BE49-F238E27FC236}">
+                <a16:creationId xmlns:a16="http://schemas.microsoft.com/office/drawing/2014/main" id="{5B7D56FD-0011-011B-54BC-D048BF0E4182}"/>
+              </a:ext>
+            </a:extLst>
+          </p:cNvPr>
+          <p:cNvSpPr/>
+          <p:nvPr/>
+        </p:nvSpPr>
+        <p:spPr>
+          <a:xfrm>
+            <a:off x="3779520" y="5206041"/>
+            <a:ext cx="1351280" cy="491706"/>
+          </a:xfrm>
+          <a:prstGeom prst="rect">
+            <a:avLst/>
+          </a:prstGeom>
+        </p:spPr>
+        <p:style>
+          <a:lnRef idx="2">
+            <a:schemeClr val="accent1">
+              <a:shade val="15000"/>
+            </a:schemeClr>
+          </a:lnRef>
+          <a:fillRef idx="1">
+            <a:schemeClr val="accent1"/>
+          </a:fillRef>
+          <a:effectRef idx="0">
+            <a:schemeClr val="accent1"/>
+          </a:effectRef>
+          <a:fontRef idx="minor">
+            <a:schemeClr val="lt1"/>
+          </a:fontRef>
+        </p:style>
+        <p:txBody>
+          <a:bodyPr rtlCol="0" anchor="ctr"/>
+          <a:lstStyle/>
+          <a:p>
+            <a:pPr algn="ctr"/>
+            <a:r>
+              <a:rPr lang="en-US" dirty="0"/>
+              <a:t>program</a:t>
+            </a:r>
+          </a:p>
+        </p:txBody>
+      </p:sp>
+      <p:sp>
+        <p:nvSpPr>
+          <p:cNvPr id="10" name="Rectangle 9">
+            <a:extLst>
+              <a:ext uri="{FF2B5EF4-FFF2-40B4-BE49-F238E27FC236}">
+                <a16:creationId xmlns:a16="http://schemas.microsoft.com/office/drawing/2014/main" id="{C5B29514-BA16-4EF4-9D3C-AD2035BE3956}"/>
+              </a:ext>
+            </a:extLst>
+          </p:cNvPr>
+          <p:cNvSpPr/>
+          <p:nvPr/>
+        </p:nvSpPr>
+        <p:spPr>
+          <a:xfrm>
+            <a:off x="3677920" y="4045617"/>
+            <a:ext cx="1351280" cy="491706"/>
+          </a:xfrm>
+          <a:prstGeom prst="rect">
+            <a:avLst/>
+          </a:prstGeom>
+        </p:spPr>
+        <p:style>
+          <a:lnRef idx="2">
+            <a:schemeClr val="accent1">
+              <a:shade val="15000"/>
+            </a:schemeClr>
+          </a:lnRef>
+          <a:fillRef idx="1">
+            <a:schemeClr val="accent1"/>
+          </a:fillRef>
+          <a:effectRef idx="0">
+            <a:schemeClr val="accent1"/>
+          </a:effectRef>
+          <a:fontRef idx="minor">
+            <a:schemeClr val="lt1"/>
+          </a:fontRef>
+        </p:style>
+        <p:txBody>
+          <a:bodyPr rtlCol="0" anchor="ctr"/>
+          <a:lstStyle/>
+          <a:p>
+            <a:pPr algn="ctr"/>
+            <a:r>
+              <a:rPr lang="en-US" dirty="0" err="1"/>
+              <a:t>hello.c</a:t>
+            </a:r>
+            <a:endParaRPr lang="en-US" dirty="0"/>
           </a:p>
         </p:txBody>
       </p:sp>
     </p:spTree>
     <p:extLst>
       <p:ext uri="{BB962C8B-B14F-4D97-AF65-F5344CB8AC3E}">
-        <p14:creationId xmlns:p14="http://schemas.microsoft.com/office/powerpoint/2010/main" val="528091887"/>
+        <p14:creationId xmlns:p14="http://schemas.microsoft.com/office/powerpoint/2010/main" val="2259833210"/>
       </p:ext>
     </p:extLst>
   </p:cSld>
@@ -4720,126 +5924,17 @@
           <a:p>
             <a:r>
               <a:rPr lang="en-US" sz="4000"/>
-              <a:t>Open point: use variable</a:t>
-            </a:r>
-          </a:p>
-        </p:txBody>
-      </p:sp>
-      <p:sp>
-        <p:nvSpPr>
-          <p:cNvPr id="3" name="TextBox 2">
-            <a:extLst>
-              <a:ext uri="{FF2B5EF4-FFF2-40B4-BE49-F238E27FC236}">
-                <a16:creationId xmlns:a16="http://schemas.microsoft.com/office/drawing/2014/main" id="{DCD3C42D-36A3-F27E-0EA8-23CB65CCC6BB}"/>
-              </a:ext>
-            </a:extLst>
-          </p:cNvPr>
-          <p:cNvSpPr txBox="1"/>
-          <p:nvPr/>
-        </p:nvSpPr>
-        <p:spPr>
-          <a:xfrm>
-            <a:off x="499932" y="2305050"/>
-            <a:ext cx="10938693" cy="4524315"/>
-          </a:xfrm>
-          <a:prstGeom prst="rect">
-            <a:avLst/>
-          </a:prstGeom>
-          <a:solidFill>
-            <a:srgbClr val="C8CFA0"/>
-          </a:solidFill>
-        </p:spPr>
-        <p:txBody>
-          <a:bodyPr wrap="square" rtlCol="0">
-            <a:spAutoFit/>
-          </a:bodyPr>
-          <a:lstStyle/>
-          <a:p>
-            <a:pPr marL="285750" indent="-285750">
-              <a:buFont typeface="Arial" panose="020B0604020202020204" pitchFamily="34" charset="0"/>
-              <a:buChar char="•"/>
-            </a:pPr>
-            <a:r>
-              <a:rPr lang="en-US" sz="3200"/>
-              <a:t>Memory occupy</a:t>
-            </a:r>
-          </a:p>
-          <a:p>
-            <a:pPr marL="285750" indent="-285750">
-              <a:buFont typeface="Arial" panose="020B0604020202020204" pitchFamily="34" charset="0"/>
-              <a:buChar char="•"/>
-            </a:pPr>
-            <a:r>
-              <a:rPr lang="en-US" sz="3200"/>
-              <a:t>Meaningful: int x?</a:t>
-            </a:r>
-          </a:p>
-          <a:p>
-            <a:pPr marL="285750" indent="-285750">
-              <a:buFont typeface="Arial" panose="020B0604020202020204" pitchFamily="34" charset="0"/>
-              <a:buChar char="•"/>
-            </a:pPr>
-            <a:r>
-              <a:rPr lang="en-US" sz="3200"/>
-              <a:t>Exercise</a:t>
-            </a:r>
-          </a:p>
-          <a:p>
-            <a:pPr marL="742950" lvl="1" indent="-285750">
-              <a:buFont typeface="Arial" panose="020B0604020202020204" pitchFamily="34" charset="0"/>
-              <a:buChar char="•"/>
-            </a:pPr>
-            <a:r>
-              <a:rPr lang="en-US" sz="3200"/>
-              <a:t>Use void type</a:t>
-            </a:r>
-          </a:p>
-          <a:p>
-            <a:pPr marL="742950" lvl="1" indent="-285750">
-              <a:buFont typeface="Arial" panose="020B0604020202020204" pitchFamily="34" charset="0"/>
-              <a:buChar char="•"/>
-            </a:pPr>
-            <a:r>
-              <a:rPr lang="en-US" sz="3200"/>
-              <a:t>Opps. Has driver</a:t>
-            </a:r>
-          </a:p>
-          <a:p>
-            <a:pPr lvl="1"/>
-            <a:r>
-              <a:rPr lang="en-US" sz="3200"/>
-              <a:t>license? (int?)</a:t>
-            </a:r>
-          </a:p>
-          <a:p>
-            <a:pPr marL="742950" lvl="1" indent="-285750">
-              <a:buFont typeface="Arial" panose="020B0604020202020204" pitchFamily="34" charset="0"/>
-              <a:buChar char="•"/>
-            </a:pPr>
-            <a:endParaRPr lang="en-US" sz="3200"/>
-          </a:p>
-          <a:p>
-            <a:pPr marL="742950" lvl="1" indent="-285750">
-              <a:buFont typeface="Arial" panose="020B0604020202020204" pitchFamily="34" charset="0"/>
-              <a:buChar char="•"/>
-            </a:pPr>
-            <a:endParaRPr lang="en-US" sz="3200"/>
-          </a:p>
-          <a:p>
-            <a:pPr marL="742950" lvl="1" indent="-285750">
-              <a:buFont typeface="Arial" panose="020B0604020202020204" pitchFamily="34" charset="0"/>
-              <a:buChar char="•"/>
-            </a:pPr>
-            <a:endParaRPr lang="en-US" sz="3200"/>
+              <a:t>2. Basic data type</a:t>
+            </a:r>
           </a:p>
         </p:txBody>
       </p:sp>
       <p:pic>
         <p:nvPicPr>
-          <p:cNvPr id="5" name="Picture 4">
+          <p:cNvPr id="4" name="Picture 3">
             <a:extLst>
               <a:ext uri="{FF2B5EF4-FFF2-40B4-BE49-F238E27FC236}">
-                <a16:creationId xmlns:a16="http://schemas.microsoft.com/office/drawing/2014/main" id="{8BE32D5E-D513-7424-C2EC-7D45253A78D6}"/>
+                <a16:creationId xmlns:a16="http://schemas.microsoft.com/office/drawing/2014/main" id="{4E65E751-AFF8-78FC-03D4-E42FC8A44969}"/>
               </a:ext>
             </a:extLst>
           </p:cNvPr>
@@ -4856,8 +5951,8 @@
         </p:blipFill>
         <p:spPr>
           <a:xfrm>
-            <a:off x="4718924" y="3437626"/>
-            <a:ext cx="6325483" cy="2495898"/>
+            <a:off x="1717334" y="2425908"/>
+            <a:ext cx="8326012" cy="3886742"/>
           </a:xfrm>
           <a:prstGeom prst="rect">
             <a:avLst/>
@@ -4867,7 +5962,7 @@
     </p:spTree>
     <p:extLst>
       <p:ext uri="{BB962C8B-B14F-4D97-AF65-F5344CB8AC3E}">
-        <p14:creationId xmlns:p14="http://schemas.microsoft.com/office/powerpoint/2010/main" val="3777061713"/>
+        <p14:creationId xmlns:p14="http://schemas.microsoft.com/office/powerpoint/2010/main" val="2652719436"/>
       </p:ext>
     </p:extLst>
   </p:cSld>
@@ -4882,7 +5977,13 @@
   <p:cSld>
     <p:spTree>
       <p:nvGrpSpPr>
-        <p:cNvPr id="1" name=""/>
+        <p:cNvPr id="1" name="">
+          <a:extLst>
+            <a:ext uri="{FF2B5EF4-FFF2-40B4-BE49-F238E27FC236}">
+              <a16:creationId xmlns:a16="http://schemas.microsoft.com/office/drawing/2014/main" id="{6ABDB481-96B5-6404-B787-C6A2564963D4}"/>
+            </a:ext>
+          </a:extLst>
+        </p:cNvPr>
         <p:cNvGrpSpPr/>
         <p:nvPr/>
       </p:nvGrpSpPr>
@@ -4896,7 +5997,13 @@
       </p:grpSpPr>
       <p:pic>
         <p:nvPicPr>
-          <p:cNvPr id="6" name="Picture 5"/>
+          <p:cNvPr id="6" name="Picture 5">
+            <a:extLst>
+              <a:ext uri="{FF2B5EF4-FFF2-40B4-BE49-F238E27FC236}">
+                <a16:creationId xmlns:a16="http://schemas.microsoft.com/office/drawing/2014/main" id="{7D14AE27-82B7-DE09-7679-AA859051CBF5}"/>
+              </a:ext>
+            </a:extLst>
+          </p:cNvPr>
           <p:cNvPicPr>
             <a:picLocks noChangeAspect="1"/>
           </p:cNvPicPr>
@@ -4929,7 +6036,7 @@
           <p:cNvPr id="2" name="TextBox 1">
             <a:extLst>
               <a:ext uri="{FF2B5EF4-FFF2-40B4-BE49-F238E27FC236}">
-                <a16:creationId xmlns:a16="http://schemas.microsoft.com/office/drawing/2014/main" id="{5A78A34D-0D8C-BD88-B427-6ADAF2538448}"/>
+                <a16:creationId xmlns:a16="http://schemas.microsoft.com/office/drawing/2014/main" id="{8F17AB57-0EA7-F127-CB22-2DC396F915A7}"/>
               </a:ext>
             </a:extLst>
           </p:cNvPr>
@@ -4956,7 +6063,7 @@
           <a:p>
             <a:r>
               <a:rPr lang="en-US" sz="4000"/>
-              <a:t>Open point: use variable</a:t>
+              <a:t>2. Basic data type</a:t>
             </a:r>
           </a:p>
         </p:txBody>
@@ -4966,7 +6073,7 @@
           <p:cNvPr id="3" name="TextBox 2">
             <a:extLst>
               <a:ext uri="{FF2B5EF4-FFF2-40B4-BE49-F238E27FC236}">
-                <a16:creationId xmlns:a16="http://schemas.microsoft.com/office/drawing/2014/main" id="{DCD3C42D-36A3-F27E-0EA8-23CB65CCC6BB}"/>
+                <a16:creationId xmlns:a16="http://schemas.microsoft.com/office/drawing/2014/main" id="{1487B23E-C6DA-396A-F85F-D097F9B925A3}"/>
               </a:ext>
             </a:extLst>
           </p:cNvPr>
@@ -4976,7 +6083,7 @@
         <p:spPr>
           <a:xfrm>
             <a:off x="499932" y="2305050"/>
-            <a:ext cx="10938693" cy="3046988"/>
+            <a:ext cx="10938693" cy="2554545"/>
           </a:xfrm>
           <a:prstGeom prst="rect">
             <a:avLst/>
@@ -4997,7 +6104,7 @@
             </a:pPr>
             <a:r>
               <a:rPr lang="en-US" sz="3200"/>
-              <a:t>Compare</a:t>
+              <a:t>Exercise: input these variables and </a:t>
             </a:r>
           </a:p>
           <a:p>
@@ -5007,7 +6114,7 @@
             </a:pPr>
             <a:r>
               <a:rPr lang="en-US" sz="3200"/>
-              <a:t>int x;</a:t>
+              <a:t>Int</a:t>
             </a:r>
           </a:p>
           <a:p>
@@ -5017,17 +6124,7 @@
             </a:pPr>
             <a:r>
               <a:rPr lang="en-US" sz="3200"/>
-              <a:t>int x = 1;</a:t>
-            </a:r>
-          </a:p>
-          <a:p>
-            <a:pPr marL="457200" indent="-457200">
-              <a:buFont typeface="Arial" panose="020B0604020202020204" pitchFamily="34" charset="0"/>
-              <a:buChar char="•"/>
-            </a:pPr>
-            <a:r>
-              <a:rPr lang="en-US" sz="3200"/>
-              <a:t>Why void? When use void?</a:t>
+              <a:t>Float</a:t>
             </a:r>
           </a:p>
           <a:p>
@@ -5035,21 +6132,27 @@
               <a:buFont typeface="Arial" panose="020B0604020202020204" pitchFamily="34" charset="0"/>
               <a:buChar char="•"/>
             </a:pPr>
-            <a:endParaRPr lang="en-US" sz="3200"/>
-          </a:p>
-          <a:p>
-            <a:pPr marL="742950" lvl="1" indent="-285750">
+            <a:r>
+              <a:rPr lang="en-US" sz="3200"/>
+              <a:t>Char</a:t>
+            </a:r>
+          </a:p>
+          <a:p>
+            <a:pPr marL="285750" indent="-285750">
               <a:buFont typeface="Arial" panose="020B0604020202020204" pitchFamily="34" charset="0"/>
               <a:buChar char="•"/>
             </a:pPr>
-            <a:endParaRPr lang="en-US" sz="3200"/>
+            <a:r>
+              <a:rPr lang="en-US" sz="3200"/>
+              <a:t>Exercise: print sizeof each data-type</a:t>
+            </a:r>
           </a:p>
         </p:txBody>
       </p:sp>
     </p:spTree>
     <p:extLst>
       <p:ext uri="{BB962C8B-B14F-4D97-AF65-F5344CB8AC3E}">
-        <p14:creationId xmlns:p14="http://schemas.microsoft.com/office/powerpoint/2010/main" val="4090739492"/>
+        <p14:creationId xmlns:p14="http://schemas.microsoft.com/office/powerpoint/2010/main" val="528091887"/>
       </p:ext>
     </p:extLst>
   </p:cSld>

--- a/Slide/C/1.Variable.pptx
+++ b/Slide/C/1.Variable.pptx
@@ -265,7 +265,7 @@
           <a:p>
             <a:fld id="{ECA3AE87-C17F-4F2C-92FF-7FE21F8A66BE}" type="datetimeFigureOut">
               <a:rPr lang="en-US" smtClean="0"/>
-              <a:t>3/18/2025</a:t>
+              <a:t>3/25/2025</a:t>
             </a:fld>
             <a:endParaRPr lang="en-US"/>
           </a:p>
@@ -433,7 +433,7 @@
           <a:p>
             <a:fld id="{ECA3AE87-C17F-4F2C-92FF-7FE21F8A66BE}" type="datetimeFigureOut">
               <a:rPr lang="en-US" smtClean="0"/>
-              <a:t>3/18/2025</a:t>
+              <a:t>3/25/2025</a:t>
             </a:fld>
             <a:endParaRPr lang="en-US"/>
           </a:p>
@@ -611,7 +611,7 @@
           <a:p>
             <a:fld id="{ECA3AE87-C17F-4F2C-92FF-7FE21F8A66BE}" type="datetimeFigureOut">
               <a:rPr lang="en-US" smtClean="0"/>
-              <a:t>3/18/2025</a:t>
+              <a:t>3/25/2025</a:t>
             </a:fld>
             <a:endParaRPr lang="en-US"/>
           </a:p>
@@ -779,7 +779,7 @@
           <a:p>
             <a:fld id="{ECA3AE87-C17F-4F2C-92FF-7FE21F8A66BE}" type="datetimeFigureOut">
               <a:rPr lang="en-US" smtClean="0"/>
-              <a:t>3/18/2025</a:t>
+              <a:t>3/25/2025</a:t>
             </a:fld>
             <a:endParaRPr lang="en-US"/>
           </a:p>
@@ -1024,7 +1024,7 @@
           <a:p>
             <a:fld id="{ECA3AE87-C17F-4F2C-92FF-7FE21F8A66BE}" type="datetimeFigureOut">
               <a:rPr lang="en-US" smtClean="0"/>
-              <a:t>3/18/2025</a:t>
+              <a:t>3/25/2025</a:t>
             </a:fld>
             <a:endParaRPr lang="en-US"/>
           </a:p>
@@ -1253,7 +1253,7 @@
           <a:p>
             <a:fld id="{ECA3AE87-C17F-4F2C-92FF-7FE21F8A66BE}" type="datetimeFigureOut">
               <a:rPr lang="en-US" smtClean="0"/>
-              <a:t>3/18/2025</a:t>
+              <a:t>3/25/2025</a:t>
             </a:fld>
             <a:endParaRPr lang="en-US"/>
           </a:p>
@@ -1617,7 +1617,7 @@
           <a:p>
             <a:fld id="{ECA3AE87-C17F-4F2C-92FF-7FE21F8A66BE}" type="datetimeFigureOut">
               <a:rPr lang="en-US" smtClean="0"/>
-              <a:t>3/18/2025</a:t>
+              <a:t>3/25/2025</a:t>
             </a:fld>
             <a:endParaRPr lang="en-US"/>
           </a:p>
@@ -1734,7 +1734,7 @@
           <a:p>
             <a:fld id="{ECA3AE87-C17F-4F2C-92FF-7FE21F8A66BE}" type="datetimeFigureOut">
               <a:rPr lang="en-US" smtClean="0"/>
-              <a:t>3/18/2025</a:t>
+              <a:t>3/25/2025</a:t>
             </a:fld>
             <a:endParaRPr lang="en-US"/>
           </a:p>
@@ -1829,7 +1829,7 @@
           <a:p>
             <a:fld id="{ECA3AE87-C17F-4F2C-92FF-7FE21F8A66BE}" type="datetimeFigureOut">
               <a:rPr lang="en-US" smtClean="0"/>
-              <a:t>3/18/2025</a:t>
+              <a:t>3/25/2025</a:t>
             </a:fld>
             <a:endParaRPr lang="en-US"/>
           </a:p>
@@ -2104,7 +2104,7 @@
           <a:p>
             <a:fld id="{ECA3AE87-C17F-4F2C-92FF-7FE21F8A66BE}" type="datetimeFigureOut">
               <a:rPr lang="en-US" smtClean="0"/>
-              <a:t>3/18/2025</a:t>
+              <a:t>3/25/2025</a:t>
             </a:fld>
             <a:endParaRPr lang="en-US"/>
           </a:p>
@@ -2356,7 +2356,7 @@
           <a:p>
             <a:fld id="{ECA3AE87-C17F-4F2C-92FF-7FE21F8A66BE}" type="datetimeFigureOut">
               <a:rPr lang="en-US" smtClean="0"/>
-              <a:t>3/18/2025</a:t>
+              <a:t>3/25/2025</a:t>
             </a:fld>
             <a:endParaRPr lang="en-US"/>
           </a:p>
@@ -2567,7 +2567,7 @@
           <a:p>
             <a:fld id="{ECA3AE87-C17F-4F2C-92FF-7FE21F8A66BE}" type="datetimeFigureOut">
               <a:rPr lang="en-US" smtClean="0"/>
-              <a:t>3/18/2025</a:t>
+              <a:t>3/25/2025</a:t>
             </a:fld>
             <a:endParaRPr lang="en-US"/>
           </a:p>
@@ -4349,7 +4349,7 @@
         <p:spPr>
           <a:xfrm>
             <a:off x="1350432" y="4514239"/>
-            <a:ext cx="3496734" cy="71642"/>
+            <a:ext cx="7651328" cy="0"/>
           </a:xfrm>
           <a:prstGeom prst="line">
             <a:avLst/>
@@ -4387,7 +4387,7 @@
         <p:spPr>
           <a:xfrm>
             <a:off x="1206499" y="5405769"/>
-            <a:ext cx="3496734" cy="67733"/>
+            <a:ext cx="7876541" cy="0"/>
           </a:xfrm>
           <a:prstGeom prst="line">
             <a:avLst/>
@@ -4652,7 +4652,7 @@
         </p:nvSpPr>
         <p:spPr>
           <a:xfrm>
-            <a:off x="1820336" y="4767225"/>
+            <a:off x="1807847" y="4633027"/>
             <a:ext cx="499532" cy="457200"/>
           </a:xfrm>
           <a:prstGeom prst="rect">
@@ -4681,6 +4681,204 @@
             <a:r>
               <a:rPr lang="en-US" dirty="0"/>
               <a:t>%</a:t>
+            </a:r>
+          </a:p>
+        </p:txBody>
+      </p:sp>
+      <p:sp>
+        <p:nvSpPr>
+          <p:cNvPr id="5" name="Rectangle 4">
+            <a:extLst>
+              <a:ext uri="{FF2B5EF4-FFF2-40B4-BE49-F238E27FC236}">
+                <a16:creationId xmlns:a16="http://schemas.microsoft.com/office/drawing/2014/main" id="{AF0EB3A0-0A30-00A5-C416-2CCBA00B3C6B}"/>
+              </a:ext>
+            </a:extLst>
+          </p:cNvPr>
+          <p:cNvSpPr/>
+          <p:nvPr/>
+        </p:nvSpPr>
+        <p:spPr>
+          <a:xfrm>
+            <a:off x="4936489" y="4843425"/>
+            <a:ext cx="479213" cy="381000"/>
+          </a:xfrm>
+          <a:prstGeom prst="rect">
+            <a:avLst/>
+          </a:prstGeom>
+        </p:spPr>
+        <p:style>
+          <a:lnRef idx="1">
+            <a:schemeClr val="accent6"/>
+          </a:lnRef>
+          <a:fillRef idx="3">
+            <a:schemeClr val="accent6"/>
+          </a:fillRef>
+          <a:effectRef idx="2">
+            <a:schemeClr val="accent6"/>
+          </a:effectRef>
+          <a:fontRef idx="minor">
+            <a:schemeClr val="lt1"/>
+          </a:fontRef>
+        </p:style>
+        <p:txBody>
+          <a:bodyPr rtlCol="0" anchor="ctr"/>
+          <a:lstStyle/>
+          <a:p>
+            <a:pPr algn="ctr"/>
+            <a:r>
+              <a:rPr lang="en-US" dirty="0"/>
+              <a:t>e</a:t>
+            </a:r>
+          </a:p>
+        </p:txBody>
+      </p:sp>
+      <p:sp>
+        <p:nvSpPr>
+          <p:cNvPr id="7" name="Rectangle 6">
+            <a:extLst>
+              <a:ext uri="{FF2B5EF4-FFF2-40B4-BE49-F238E27FC236}">
+                <a16:creationId xmlns:a16="http://schemas.microsoft.com/office/drawing/2014/main" id="{2EA11D45-66EB-9019-E157-2C7C2BFABDFD}"/>
+              </a:ext>
+            </a:extLst>
+          </p:cNvPr>
+          <p:cNvSpPr/>
+          <p:nvPr/>
+        </p:nvSpPr>
+        <p:spPr>
+          <a:xfrm>
+            <a:off x="2070102" y="3892973"/>
+            <a:ext cx="1195068" cy="434600"/>
+          </a:xfrm>
+          <a:prstGeom prst="rect">
+            <a:avLst/>
+          </a:prstGeom>
+        </p:spPr>
+        <p:style>
+          <a:lnRef idx="2">
+            <a:schemeClr val="accent1">
+              <a:shade val="15000"/>
+            </a:schemeClr>
+          </a:lnRef>
+          <a:fillRef idx="1">
+            <a:schemeClr val="accent1"/>
+          </a:fillRef>
+          <a:effectRef idx="0">
+            <a:schemeClr val="accent1"/>
+          </a:effectRef>
+          <a:fontRef idx="minor">
+            <a:schemeClr val="lt1"/>
+          </a:fontRef>
+        </p:style>
+        <p:txBody>
+          <a:bodyPr rtlCol="0" anchor="ctr"/>
+          <a:lstStyle/>
+          <a:p>
+            <a:pPr algn="ctr"/>
+            <a:r>
+              <a:rPr lang="en-US" dirty="0" err="1"/>
+              <a:t>Getchar</a:t>
+            </a:r>
+            <a:r>
+              <a:rPr lang="en-US" dirty="0"/>
+              <a:t>()</a:t>
+            </a:r>
+          </a:p>
+        </p:txBody>
+      </p:sp>
+      <p:sp>
+        <p:nvSpPr>
+          <p:cNvPr id="12" name="Rectangle 11">
+            <a:extLst>
+              <a:ext uri="{FF2B5EF4-FFF2-40B4-BE49-F238E27FC236}">
+                <a16:creationId xmlns:a16="http://schemas.microsoft.com/office/drawing/2014/main" id="{4B8F4DE2-68C3-1A54-11D7-0D84DCAD891A}"/>
+              </a:ext>
+            </a:extLst>
+          </p:cNvPr>
+          <p:cNvSpPr/>
+          <p:nvPr/>
+        </p:nvSpPr>
+        <p:spPr>
+          <a:xfrm>
+            <a:off x="2070102" y="5728577"/>
+            <a:ext cx="1195068" cy="434600"/>
+          </a:xfrm>
+          <a:prstGeom prst="rect">
+            <a:avLst/>
+          </a:prstGeom>
+        </p:spPr>
+        <p:style>
+          <a:lnRef idx="3">
+            <a:schemeClr val="lt1"/>
+          </a:lnRef>
+          <a:fillRef idx="1">
+            <a:schemeClr val="accent4"/>
+          </a:fillRef>
+          <a:effectRef idx="1">
+            <a:schemeClr val="accent4"/>
+          </a:effectRef>
+          <a:fontRef idx="minor">
+            <a:schemeClr val="lt1"/>
+          </a:fontRef>
+        </p:style>
+        <p:txBody>
+          <a:bodyPr rtlCol="0" anchor="ctr"/>
+          <a:lstStyle/>
+          <a:p>
+            <a:pPr algn="ctr"/>
+            <a:r>
+              <a:rPr lang="en-US" dirty="0" err="1"/>
+              <a:t>Putchar</a:t>
+            </a:r>
+            <a:r>
+              <a:rPr lang="en-US" dirty="0"/>
+              <a:t>()</a:t>
+            </a:r>
+          </a:p>
+        </p:txBody>
+      </p:sp>
+      <p:sp>
+        <p:nvSpPr>
+          <p:cNvPr id="14" name="Rectangle 13">
+            <a:extLst>
+              <a:ext uri="{FF2B5EF4-FFF2-40B4-BE49-F238E27FC236}">
+                <a16:creationId xmlns:a16="http://schemas.microsoft.com/office/drawing/2014/main" id="{32D54ABF-F667-E88E-DFA6-0DFC02AC6D71}"/>
+              </a:ext>
+            </a:extLst>
+          </p:cNvPr>
+          <p:cNvSpPr/>
+          <p:nvPr/>
+        </p:nvSpPr>
+        <p:spPr>
+          <a:xfrm>
+            <a:off x="8188960" y="4683760"/>
+            <a:ext cx="812800" cy="540664"/>
+          </a:xfrm>
+          <a:prstGeom prst="rect">
+            <a:avLst/>
+          </a:prstGeom>
+        </p:spPr>
+        <p:style>
+          <a:lnRef idx="1">
+            <a:schemeClr val="dk1"/>
+          </a:lnRef>
+          <a:fillRef idx="3">
+            <a:schemeClr val="dk1"/>
+          </a:fillRef>
+          <a:effectRef idx="2">
+            <a:schemeClr val="dk1"/>
+          </a:effectRef>
+          <a:fontRef idx="minor">
+            <a:schemeClr val="lt1"/>
+          </a:fontRef>
+        </p:style>
+        <p:txBody>
+          <a:bodyPr rtlCol="0" anchor="ctr"/>
+          <a:lstStyle/>
+          <a:p>
+            <a:pPr algn="ctr"/>
+            <a:r>
+              <a:rPr lang="en-US" dirty="0"/>
+              <a:t>EOF</a:t>
             </a:r>
           </a:p>
         </p:txBody>
